--- a/public/fun/pack/pptx/family/가족소개_18_3대가족_바닷가등대.pptx
+++ b/public/fun/pack/pptx/family/가족소개_18_3대가족_바닷가등대.pptx
@@ -3286,14 +3286,6 @@
 <file path=ppt/slides/slide1.xml><?xml version="1.0" encoding="utf-8"?>
 <p:sld xmlns:a="http://schemas.openxmlformats.org/drawingml/2006/main" xmlns:p="http://schemas.openxmlformats.org/presentationml/2006/main" xmlns:r="http://schemas.openxmlformats.org/officeDocument/2006/relationships">
   <p:cSld>
-    <p:bg>
-      <p:bgPr>
-        <a:solidFill>
-          <a:srgbClr val="FFFFFF"/>
-        </a:solidFill>
-        <a:effectLst/>
-      </p:bgPr>
-    </p:bg>
     <p:spTree>
       <p:nvGrpSpPr>
         <p:cNvPr id="1" name=""/>
@@ -3301,151 +3293,30 @@
         <p:nvPr/>
       </p:nvGrpSpPr>
       <p:grpSpPr/>
-      <p:sp>
-        <p:nvSpPr>
-          <p:cNvPr id="3" name="장식"/>
-          <p:cNvSpPr/>
+      <p:pic>
+        <p:nvPicPr>
+          <p:cNvPr id="3" name="표지 그림" descr="family-18.jpg"/>
+          <p:cNvPicPr>
+            <a:picLocks noChangeAspect="1"/>
+          </p:cNvPicPr>
           <p:nvPr/>
-        </p:nvSpPr>
-        <p:spPr>
-          <a:xfrm>
-            <a:off x="0" y="2057400"/>
-            <a:ext cx="10241023" cy="1828800"/>
-          </a:xfrm>
-          <a:prstGeom prst="homePlate">
-            <a:avLst/>
-          </a:prstGeom>
-          <a:solidFill>
-            <a:srgbClr val="25799D"/>
-          </a:solidFill>
-          <a:ln>
-            <a:noFill/>
-          </a:ln>
-        </p:spPr>
-        <p:txBody>
-          <a:bodyPr rtlCol="0" anchor="ctr"/>
-          <a:lstStyle/>
-          <a:p>
-            <a:pPr algn="ctr"/>
-          </a:p>
-        </p:txBody>
-      </p:sp>
-      <p:sp>
-        <p:nvSpPr>
-          <p:cNvPr id="4" name="장식"/>
-          <p:cNvSpPr/>
-          <p:nvPr/>
-        </p:nvSpPr>
-        <p:spPr>
-          <a:xfrm>
-            <a:off x="0" y="3886200"/>
-            <a:ext cx="9509522" cy="64008"/>
+        </p:nvPicPr>
+        <p:blipFill>
+          <a:blip r:embed="rId2"/>
+          <a:stretch>
+            <a:fillRect/>
+          </a:stretch>
+        </p:blipFill>
+        <p:spPr>
+          <a:xfrm>
+            <a:off x="0" y="0"/>
+            <a:ext cx="12191695" cy="6858000"/>
           </a:xfrm>
           <a:prstGeom prst="rect">
             <a:avLst/>
           </a:prstGeom>
-          <a:solidFill>
-            <a:srgbClr val="913B4C"/>
-          </a:solidFill>
-          <a:ln>
-            <a:noFill/>
-          </a:ln>
-        </p:spPr>
-        <p:txBody>
-          <a:bodyPr rtlCol="0" anchor="ctr"/>
-          <a:lstStyle/>
-          <a:p>
-            <a:pPr algn="ctr"/>
-          </a:p>
-        </p:txBody>
-      </p:sp>
-      <p:sp>
-        <p:nvSpPr>
-          <p:cNvPr id="5" name="장식"/>
-          <p:cNvSpPr/>
-          <p:nvPr/>
-        </p:nvSpPr>
-        <p:spPr>
-          <a:xfrm>
-            <a:off x="9329659" y="672084"/>
-            <a:ext cx="2798064" cy="699516"/>
-          </a:xfrm>
-          <a:prstGeom prst="wave">
-            <a:avLst/>
-          </a:prstGeom>
-          <a:solidFill>
-            <a:srgbClr val="CCE9F5"/>
-          </a:solidFill>
-          <a:ln>
-            <a:noFill/>
-          </a:ln>
-        </p:spPr>
-        <p:txBody>
-          <a:bodyPr rtlCol="0" anchor="ctr"/>
-          <a:lstStyle/>
-          <a:p>
-            <a:pPr algn="ctr"/>
-          </a:p>
-        </p:txBody>
-      </p:sp>
-      <p:sp>
-        <p:nvSpPr>
-          <p:cNvPr id="6" name="장식"/>
-          <p:cNvSpPr/>
-          <p:nvPr/>
-        </p:nvSpPr>
-        <p:spPr>
-          <a:xfrm>
-            <a:off x="9329659" y="1278331"/>
-            <a:ext cx="2798064" cy="699516"/>
-          </a:xfrm>
-          <a:prstGeom prst="wave">
-            <a:avLst/>
-          </a:prstGeom>
-          <a:solidFill>
-            <a:srgbClr val="25799D"/>
-          </a:solidFill>
-          <a:ln>
-            <a:noFill/>
-          </a:ln>
-        </p:spPr>
-        <p:txBody>
-          <a:bodyPr rtlCol="0" anchor="ctr"/>
-          <a:lstStyle/>
-          <a:p>
-            <a:pPr algn="ctr"/>
-          </a:p>
-        </p:txBody>
-      </p:sp>
-      <p:sp>
-        <p:nvSpPr>
-          <p:cNvPr id="7" name="장식"/>
-          <p:cNvSpPr/>
-          <p:nvPr/>
-        </p:nvSpPr>
-        <p:spPr>
-          <a:xfrm>
-            <a:off x="9329659" y="1884578"/>
-            <a:ext cx="2798064" cy="699516"/>
-          </a:xfrm>
-          <a:prstGeom prst="wave">
-            <a:avLst/>
-          </a:prstGeom>
-          <a:solidFill>
-            <a:srgbClr val="913B4C"/>
-          </a:solidFill>
-          <a:ln>
-            <a:noFill/>
-          </a:ln>
-        </p:spPr>
-        <p:txBody>
-          <a:bodyPr rtlCol="0" anchor="ctr"/>
-          <a:lstStyle/>
-          <a:p>
-            <a:pPr algn="ctr"/>
-          </a:p>
-        </p:txBody>
-      </p:sp>
+        </p:spPr>
+      </p:pic>
       <p:sp>
         <p:nvSpPr>
           <p:cNvPr id="2" name="Title 1"/>
@@ -3458,8 +3329,8 @@
         </p:nvSpPr>
         <p:spPr>
           <a:xfrm>
-            <a:off x="731501" y="2167128"/>
-            <a:ext cx="8778020" cy="1609344"/>
+            <a:off x="853418" y="2057400"/>
+            <a:ext cx="6095847" cy="1554480"/>
           </a:xfrm>
         </p:spPr>
         <p:txBody>
@@ -3476,7 +3347,7 @@
             <a:r>
               <a:rPr sz="3600" b="1" i="0">
                 <a:solidFill>
-                  <a:srgbClr val="FFFFFF"/>
+                  <a:srgbClr val="11394A"/>
                 </a:solidFill>
               </a:rPr>
               <a:t>우리 가족을 소개합니다</a:t>
@@ -3486,14 +3357,14 @@
       </p:sp>
       <p:sp>
         <p:nvSpPr>
-          <p:cNvPr id="8" name="한 줄 문구"/>
+          <p:cNvPr id="4" name="한 줄 문구"/>
           <p:cNvSpPr txBox="1"/>
           <p:nvPr/>
         </p:nvSpPr>
         <p:spPr>
           <a:xfrm>
-            <a:off x="731501" y="4160520"/>
-            <a:ext cx="8534186" cy="822960"/>
+            <a:off x="853418" y="3749039"/>
+            <a:ext cx="6095847" cy="822960"/>
           </a:xfrm>
           <a:prstGeom prst="rect">
             <a:avLst/>
@@ -3517,21 +3388,21 @@
                   <a:srgbClr val="11394A"/>
                 </a:solidFill>
               </a:rPr>
-              <a:t>등대처럼 서로의 길을 비춰 주는 우리</a:t>
-            </a:r>
-          </a:p>
-        </p:txBody>
-      </p:sp>
-      <p:sp>
-        <p:nvSpPr>
-          <p:cNvPr id="9" name="안내 문구"/>
+              <a:t>바닷가 등대까지 걸어간 여름휴가</a:t>
+            </a:r>
+          </a:p>
+        </p:txBody>
+      </p:sp>
+      <p:sp>
+        <p:nvSpPr>
+          <p:cNvPr id="5" name="안내 문구"/>
           <p:cNvSpPr txBox="1"/>
           <p:nvPr/>
         </p:nvSpPr>
         <p:spPr>
           <a:xfrm>
-            <a:off x="731501" y="5029200"/>
-            <a:ext cx="8534186" cy="914400"/>
+            <a:off x="853418" y="4617720"/>
+            <a:ext cx="6095847" cy="914400"/>
           </a:xfrm>
           <a:prstGeom prst="rect">
             <a:avLst/>
@@ -3555,7 +3426,7 @@
                   <a:srgbClr val="666666"/>
                 </a:solidFill>
               </a:rPr>
-              <a:t>3대 가족 · 2026. 00. 00</a:t>
+              <a:t>3대 가족 · 2027. 00. 00</a:t>
             </a:r>
           </a:p>
         </p:txBody>
@@ -3617,93 +3488,6 @@
       </p:sp>
       <p:sp>
         <p:nvSpPr>
-          <p:cNvPr id="4" name="장식"/>
-          <p:cNvSpPr/>
-          <p:nvPr/>
-        </p:nvSpPr>
-        <p:spPr>
-          <a:xfrm>
-            <a:off x="10719511" y="475488"/>
-            <a:ext cx="1207008" cy="301752"/>
-          </a:xfrm>
-          <a:prstGeom prst="wave">
-            <a:avLst/>
-          </a:prstGeom>
-          <a:solidFill>
-            <a:srgbClr val="CCE9F5"/>
-          </a:solidFill>
-          <a:ln>
-            <a:noFill/>
-          </a:ln>
-        </p:spPr>
-        <p:txBody>
-          <a:bodyPr rtlCol="0" anchor="ctr"/>
-          <a:lstStyle/>
-          <a:p>
-            <a:pPr algn="ctr"/>
-          </a:p>
-        </p:txBody>
-      </p:sp>
-      <p:sp>
-        <p:nvSpPr>
-          <p:cNvPr id="5" name="장식"/>
-          <p:cNvSpPr/>
-          <p:nvPr/>
-        </p:nvSpPr>
-        <p:spPr>
-          <a:xfrm>
-            <a:off x="10719511" y="737006"/>
-            <a:ext cx="1207008" cy="301752"/>
-          </a:xfrm>
-          <a:prstGeom prst="wave">
-            <a:avLst/>
-          </a:prstGeom>
-          <a:solidFill>
-            <a:srgbClr val="25799D"/>
-          </a:solidFill>
-          <a:ln>
-            <a:noFill/>
-          </a:ln>
-        </p:spPr>
-        <p:txBody>
-          <a:bodyPr rtlCol="0" anchor="ctr"/>
-          <a:lstStyle/>
-          <a:p>
-            <a:pPr algn="ctr"/>
-          </a:p>
-        </p:txBody>
-      </p:sp>
-      <p:sp>
-        <p:nvSpPr>
-          <p:cNvPr id="6" name="장식"/>
-          <p:cNvSpPr/>
-          <p:nvPr/>
-        </p:nvSpPr>
-        <p:spPr>
-          <a:xfrm>
-            <a:off x="10719511" y="998524"/>
-            <a:ext cx="1207008" cy="301752"/>
-          </a:xfrm>
-          <a:prstGeom prst="wave">
-            <a:avLst/>
-          </a:prstGeom>
-          <a:solidFill>
-            <a:srgbClr val="913B4C"/>
-          </a:solidFill>
-          <a:ln>
-            <a:noFill/>
-          </a:ln>
-        </p:spPr>
-        <p:txBody>
-          <a:bodyPr rtlCol="0" anchor="ctr"/>
-          <a:lstStyle/>
-          <a:p>
-            <a:pPr algn="ctr"/>
-          </a:p>
-        </p:txBody>
-      </p:sp>
-      <p:sp>
-        <p:nvSpPr>
           <p:cNvPr id="2" name="Title 1"/>
           <p:cNvSpPr>
             <a:spLocks noGrp="1"/>
@@ -3742,7 +3526,7 @@
       </p:sp>
       <p:sp>
         <p:nvSpPr>
-          <p:cNvPr id="7" name="사진 자리"/>
+          <p:cNvPr id="4" name="사진 자리"/>
           <p:cNvSpPr/>
           <p:nvPr/>
         </p:nvSpPr>
@@ -3788,7 +3572,7 @@
       </p:sp>
       <p:sp>
         <p:nvSpPr>
-          <p:cNvPr id="8" name="TextBox 7"/>
+          <p:cNvPr id="5" name="TextBox 4"/>
           <p:cNvSpPr txBox="1"/>
           <p:nvPr/>
         </p:nvSpPr>
@@ -3826,7 +3610,7 @@
       </p:sp>
       <p:sp>
         <p:nvSpPr>
-          <p:cNvPr id="9" name="TextBox 8"/>
+          <p:cNvPr id="6" name="TextBox 5"/>
           <p:cNvSpPr txBox="1"/>
           <p:nvPr/>
         </p:nvSpPr>
@@ -3894,7 +3678,7 @@
       </p:sp>
       <p:sp>
         <p:nvSpPr>
-          <p:cNvPr id="10" name="사진 자리"/>
+          <p:cNvPr id="7" name="사진 자리"/>
           <p:cNvSpPr/>
           <p:nvPr/>
         </p:nvSpPr>
@@ -3940,7 +3724,7 @@
       </p:sp>
       <p:sp>
         <p:nvSpPr>
-          <p:cNvPr id="11" name="TextBox 10"/>
+          <p:cNvPr id="8" name="TextBox 7"/>
           <p:cNvSpPr txBox="1"/>
           <p:nvPr/>
         </p:nvSpPr>
@@ -3978,7 +3762,7 @@
       </p:sp>
       <p:sp>
         <p:nvSpPr>
-          <p:cNvPr id="12" name="TextBox 11"/>
+          <p:cNvPr id="9" name="TextBox 8"/>
           <p:cNvSpPr txBox="1"/>
           <p:nvPr/>
         </p:nvSpPr>
@@ -4046,7 +3830,7 @@
       </p:sp>
       <p:sp>
         <p:nvSpPr>
-          <p:cNvPr id="13" name="사진 자리"/>
+          <p:cNvPr id="10" name="사진 자리"/>
           <p:cNvSpPr/>
           <p:nvPr/>
         </p:nvSpPr>
@@ -4092,7 +3876,7 @@
       </p:sp>
       <p:sp>
         <p:nvSpPr>
-          <p:cNvPr id="14" name="TextBox 13"/>
+          <p:cNvPr id="11" name="TextBox 10"/>
           <p:cNvSpPr txBox="1"/>
           <p:nvPr/>
         </p:nvSpPr>
@@ -4130,7 +3914,7 @@
       </p:sp>
       <p:sp>
         <p:nvSpPr>
-          <p:cNvPr id="15" name="TextBox 14"/>
+          <p:cNvPr id="12" name="TextBox 11"/>
           <p:cNvSpPr txBox="1"/>
           <p:nvPr/>
         </p:nvSpPr>
@@ -4198,7 +3982,7 @@
       </p:sp>
       <p:sp>
         <p:nvSpPr>
-          <p:cNvPr id="16" name="사진 자리"/>
+          <p:cNvPr id="13" name="사진 자리"/>
           <p:cNvSpPr/>
           <p:nvPr/>
         </p:nvSpPr>
@@ -4244,7 +4028,7 @@
       </p:sp>
       <p:sp>
         <p:nvSpPr>
-          <p:cNvPr id="17" name="TextBox 16"/>
+          <p:cNvPr id="14" name="TextBox 13"/>
           <p:cNvSpPr txBox="1"/>
           <p:nvPr/>
         </p:nvSpPr>
@@ -4282,7 +4066,7 @@
       </p:sp>
       <p:sp>
         <p:nvSpPr>
-          <p:cNvPr id="18" name="TextBox 17"/>
+          <p:cNvPr id="15" name="TextBox 14"/>
           <p:cNvSpPr txBox="1"/>
           <p:nvPr/>
         </p:nvSpPr>
@@ -4350,7 +4134,7 @@
       </p:sp>
       <p:sp>
         <p:nvSpPr>
-          <p:cNvPr id="19" name="사진 자리"/>
+          <p:cNvPr id="16" name="사진 자리"/>
           <p:cNvSpPr/>
           <p:nvPr/>
         </p:nvSpPr>
@@ -4396,7 +4180,7 @@
       </p:sp>
       <p:sp>
         <p:nvSpPr>
-          <p:cNvPr id="20" name="TextBox 19"/>
+          <p:cNvPr id="17" name="TextBox 16"/>
           <p:cNvSpPr txBox="1"/>
           <p:nvPr/>
         </p:nvSpPr>
@@ -4434,7 +4218,7 @@
       </p:sp>
       <p:sp>
         <p:nvSpPr>
-          <p:cNvPr id="21" name="TextBox 20"/>
+          <p:cNvPr id="18" name="TextBox 17"/>
           <p:cNvSpPr txBox="1"/>
           <p:nvPr/>
         </p:nvSpPr>
@@ -4502,7 +4286,7 @@
       </p:sp>
       <p:sp>
         <p:nvSpPr>
-          <p:cNvPr id="22" name="사진 자리"/>
+          <p:cNvPr id="19" name="사진 자리"/>
           <p:cNvSpPr/>
           <p:nvPr/>
         </p:nvSpPr>
@@ -4548,7 +4332,7 @@
       </p:sp>
       <p:sp>
         <p:nvSpPr>
-          <p:cNvPr id="23" name="TextBox 22"/>
+          <p:cNvPr id="20" name="TextBox 19"/>
           <p:cNvSpPr txBox="1"/>
           <p:nvPr/>
         </p:nvSpPr>
@@ -4586,7 +4370,7 @@
       </p:sp>
       <p:sp>
         <p:nvSpPr>
-          <p:cNvPr id="24" name="TextBox 23"/>
+          <p:cNvPr id="21" name="TextBox 20"/>
           <p:cNvSpPr txBox="1"/>
           <p:nvPr/>
         </p:nvSpPr>
@@ -4709,16 +4493,54 @@
       </p:sp>
       <p:sp>
         <p:nvSpPr>
-          <p:cNvPr id="4" name="장식"/>
+          <p:cNvPr id="2" name="Title 1"/>
+          <p:cNvSpPr>
+            <a:spLocks noGrp="1"/>
+          </p:cNvSpPr>
+          <p:nvPr>
+            <p:ph type="title"/>
+          </p:nvPr>
+        </p:nvSpPr>
+        <p:spPr>
+          <a:xfrm>
+            <a:off x="640080" y="411480"/>
+            <a:ext cx="8412242" cy="822960"/>
+          </a:xfrm>
+        </p:spPr>
+        <p:txBody>
+          <a:bodyPr wrap="square" lIns="54864" rIns="54864" tIns="27432" bIns="27432" anchor="ctr">
+            <a:noAutofit/>
+          </a:bodyPr>
+          <a:lstStyle/>
+          <a:p>
+            <a:pPr algn="l">
+              <a:lnSpc>
+                <a:spcPct val="105000"/>
+              </a:lnSpc>
+            </a:pPr>
+            <a:r>
+              <a:rPr sz="3000" b="1" i="0">
+                <a:solidFill>
+                  <a:srgbClr val="FFFFFF"/>
+                </a:solidFill>
+              </a:rPr>
+              <a:t>우리 가족 이야기</a:t>
+            </a:r>
+          </a:p>
+        </p:txBody>
+      </p:sp>
+      <p:sp>
+        <p:nvSpPr>
+          <p:cNvPr id="4" name="타임라인 선"/>
           <p:cNvSpPr/>
           <p:nvPr/>
         </p:nvSpPr>
         <p:spPr>
           <a:xfrm>
-            <a:off x="10719511" y="475488"/>
-            <a:ext cx="1207008" cy="301752"/>
-          </a:xfrm>
-          <a:prstGeom prst="wave">
+            <a:off x="640080" y="3383280"/>
+            <a:ext cx="10911535" cy="54864"/>
+          </a:xfrm>
+          <a:prstGeom prst="rect">
             <a:avLst/>
           </a:prstGeom>
           <a:solidFill>
@@ -4738,132 +4560,7 @@
       </p:sp>
       <p:sp>
         <p:nvSpPr>
-          <p:cNvPr id="5" name="장식"/>
-          <p:cNvSpPr/>
-          <p:nvPr/>
-        </p:nvSpPr>
-        <p:spPr>
-          <a:xfrm>
-            <a:off x="10719511" y="737006"/>
-            <a:ext cx="1207008" cy="301752"/>
-          </a:xfrm>
-          <a:prstGeom prst="wave">
-            <a:avLst/>
-          </a:prstGeom>
-          <a:solidFill>
-            <a:srgbClr val="25799D"/>
-          </a:solidFill>
-          <a:ln>
-            <a:noFill/>
-          </a:ln>
-        </p:spPr>
-        <p:txBody>
-          <a:bodyPr rtlCol="0" anchor="ctr"/>
-          <a:lstStyle/>
-          <a:p>
-            <a:pPr algn="ctr"/>
-          </a:p>
-        </p:txBody>
-      </p:sp>
-      <p:sp>
-        <p:nvSpPr>
-          <p:cNvPr id="6" name="장식"/>
-          <p:cNvSpPr/>
-          <p:nvPr/>
-        </p:nvSpPr>
-        <p:spPr>
-          <a:xfrm>
-            <a:off x="10719511" y="998524"/>
-            <a:ext cx="1207008" cy="301752"/>
-          </a:xfrm>
-          <a:prstGeom prst="wave">
-            <a:avLst/>
-          </a:prstGeom>
-          <a:solidFill>
-            <a:srgbClr val="913B4C"/>
-          </a:solidFill>
-          <a:ln>
-            <a:noFill/>
-          </a:ln>
-        </p:spPr>
-        <p:txBody>
-          <a:bodyPr rtlCol="0" anchor="ctr"/>
-          <a:lstStyle/>
-          <a:p>
-            <a:pPr algn="ctr"/>
-          </a:p>
-        </p:txBody>
-      </p:sp>
-      <p:sp>
-        <p:nvSpPr>
-          <p:cNvPr id="2" name="Title 1"/>
-          <p:cNvSpPr>
-            <a:spLocks noGrp="1"/>
-          </p:cNvSpPr>
-          <p:nvPr>
-            <p:ph type="title"/>
-          </p:nvPr>
-        </p:nvSpPr>
-        <p:spPr>
-          <a:xfrm>
-            <a:off x="640080" y="411480"/>
-            <a:ext cx="8412242" cy="822960"/>
-          </a:xfrm>
-        </p:spPr>
-        <p:txBody>
-          <a:bodyPr wrap="square" lIns="54864" rIns="54864" tIns="27432" bIns="27432" anchor="ctr">
-            <a:noAutofit/>
-          </a:bodyPr>
-          <a:lstStyle/>
-          <a:p>
-            <a:pPr algn="l">
-              <a:lnSpc>
-                <a:spcPct val="105000"/>
-              </a:lnSpc>
-            </a:pPr>
-            <a:r>
-              <a:rPr sz="3000" b="1" i="0">
-                <a:solidFill>
-                  <a:srgbClr val="FFFFFF"/>
-                </a:solidFill>
-              </a:rPr>
-              <a:t>우리 가족 이야기</a:t>
-            </a:r>
-          </a:p>
-        </p:txBody>
-      </p:sp>
-      <p:sp>
-        <p:nvSpPr>
-          <p:cNvPr id="7" name="타임라인 선"/>
-          <p:cNvSpPr/>
-          <p:nvPr/>
-        </p:nvSpPr>
-        <p:spPr>
-          <a:xfrm>
-            <a:off x="640080" y="3383280"/>
-            <a:ext cx="10911535" cy="54864"/>
-          </a:xfrm>
-          <a:prstGeom prst="rect">
-            <a:avLst/>
-          </a:prstGeom>
-          <a:solidFill>
-            <a:srgbClr val="CCE9F5"/>
-          </a:solidFill>
-          <a:ln>
-            <a:noFill/>
-          </a:ln>
-        </p:spPr>
-        <p:txBody>
-          <a:bodyPr rtlCol="0" anchor="ctr"/>
-          <a:lstStyle/>
-          <a:p>
-            <a:pPr algn="ctr"/>
-          </a:p>
-        </p:txBody>
-      </p:sp>
-      <p:sp>
-        <p:nvSpPr>
-          <p:cNvPr id="8" name="때 1"/>
+          <p:cNvPr id="5" name="때 1"/>
           <p:cNvSpPr/>
           <p:nvPr/>
         </p:nvSpPr>
@@ -4894,7 +4591,7 @@
       </p:sp>
       <p:sp>
         <p:nvSpPr>
-          <p:cNvPr id="9" name="TextBox 8"/>
+          <p:cNvPr id="6" name="TextBox 5"/>
           <p:cNvSpPr txBox="1"/>
           <p:nvPr/>
         </p:nvSpPr>
@@ -4932,7 +4629,7 @@
       </p:sp>
       <p:sp>
         <p:nvSpPr>
-          <p:cNvPr id="10" name="TextBox 9"/>
+          <p:cNvPr id="7" name="TextBox 6"/>
           <p:cNvSpPr txBox="1"/>
           <p:nvPr/>
         </p:nvSpPr>
@@ -4970,7 +4667,7 @@
       </p:sp>
       <p:sp>
         <p:nvSpPr>
-          <p:cNvPr id="11" name="TextBox 10"/>
+          <p:cNvPr id="8" name="TextBox 7"/>
           <p:cNvSpPr txBox="1"/>
           <p:nvPr/>
         </p:nvSpPr>
@@ -5008,7 +4705,7 @@
       </p:sp>
       <p:sp>
         <p:nvSpPr>
-          <p:cNvPr id="12" name="때 2"/>
+          <p:cNvPr id="9" name="때 2"/>
           <p:cNvSpPr/>
           <p:nvPr/>
         </p:nvSpPr>
@@ -5039,7 +4736,7 @@
       </p:sp>
       <p:sp>
         <p:nvSpPr>
-          <p:cNvPr id="13" name="TextBox 12"/>
+          <p:cNvPr id="10" name="TextBox 9"/>
           <p:cNvSpPr txBox="1"/>
           <p:nvPr/>
         </p:nvSpPr>
@@ -5077,7 +4774,7 @@
       </p:sp>
       <p:sp>
         <p:nvSpPr>
-          <p:cNvPr id="14" name="TextBox 13"/>
+          <p:cNvPr id="11" name="TextBox 10"/>
           <p:cNvSpPr txBox="1"/>
           <p:nvPr/>
         </p:nvSpPr>
@@ -5115,7 +4812,7 @@
       </p:sp>
       <p:sp>
         <p:nvSpPr>
-          <p:cNvPr id="15" name="TextBox 14"/>
+          <p:cNvPr id="12" name="TextBox 11"/>
           <p:cNvSpPr txBox="1"/>
           <p:nvPr/>
         </p:nvSpPr>
@@ -5153,7 +4850,7 @@
       </p:sp>
       <p:sp>
         <p:nvSpPr>
-          <p:cNvPr id="16" name="때 3"/>
+          <p:cNvPr id="13" name="때 3"/>
           <p:cNvSpPr/>
           <p:nvPr/>
         </p:nvSpPr>
@@ -5184,7 +4881,7 @@
       </p:sp>
       <p:sp>
         <p:nvSpPr>
-          <p:cNvPr id="17" name="TextBox 16"/>
+          <p:cNvPr id="14" name="TextBox 13"/>
           <p:cNvSpPr txBox="1"/>
           <p:nvPr/>
         </p:nvSpPr>
@@ -5222,7 +4919,7 @@
       </p:sp>
       <p:sp>
         <p:nvSpPr>
-          <p:cNvPr id="18" name="TextBox 17"/>
+          <p:cNvPr id="15" name="TextBox 14"/>
           <p:cNvSpPr txBox="1"/>
           <p:nvPr/>
         </p:nvSpPr>
@@ -5260,7 +4957,7 @@
       </p:sp>
       <p:sp>
         <p:nvSpPr>
-          <p:cNvPr id="19" name="TextBox 18"/>
+          <p:cNvPr id="16" name="TextBox 15"/>
           <p:cNvSpPr txBox="1"/>
           <p:nvPr/>
         </p:nvSpPr>
@@ -5298,7 +4995,7 @@
       </p:sp>
       <p:sp>
         <p:nvSpPr>
-          <p:cNvPr id="20" name="때 4"/>
+          <p:cNvPr id="17" name="때 4"/>
           <p:cNvSpPr/>
           <p:nvPr/>
         </p:nvSpPr>
@@ -5329,7 +5026,7 @@
       </p:sp>
       <p:sp>
         <p:nvSpPr>
-          <p:cNvPr id="21" name="TextBox 20"/>
+          <p:cNvPr id="18" name="TextBox 17"/>
           <p:cNvSpPr txBox="1"/>
           <p:nvPr/>
         </p:nvSpPr>
@@ -5367,7 +5064,7 @@
       </p:sp>
       <p:sp>
         <p:nvSpPr>
-          <p:cNvPr id="22" name="TextBox 21"/>
+          <p:cNvPr id="19" name="TextBox 18"/>
           <p:cNvSpPr txBox="1"/>
           <p:nvPr/>
         </p:nvSpPr>
@@ -5405,7 +5102,7 @@
       </p:sp>
       <p:sp>
         <p:nvSpPr>
-          <p:cNvPr id="23" name="TextBox 22"/>
+          <p:cNvPr id="20" name="TextBox 19"/>
           <p:cNvSpPr txBox="1"/>
           <p:nvPr/>
         </p:nvSpPr>
@@ -5498,93 +5195,6 @@
       </p:sp>
       <p:sp>
         <p:nvSpPr>
-          <p:cNvPr id="4" name="장식"/>
-          <p:cNvSpPr/>
-          <p:nvPr/>
-        </p:nvSpPr>
-        <p:spPr>
-          <a:xfrm>
-            <a:off x="10719511" y="475488"/>
-            <a:ext cx="1207008" cy="301752"/>
-          </a:xfrm>
-          <a:prstGeom prst="wave">
-            <a:avLst/>
-          </a:prstGeom>
-          <a:solidFill>
-            <a:srgbClr val="CCE9F5"/>
-          </a:solidFill>
-          <a:ln>
-            <a:noFill/>
-          </a:ln>
-        </p:spPr>
-        <p:txBody>
-          <a:bodyPr rtlCol="0" anchor="ctr"/>
-          <a:lstStyle/>
-          <a:p>
-            <a:pPr algn="ctr"/>
-          </a:p>
-        </p:txBody>
-      </p:sp>
-      <p:sp>
-        <p:nvSpPr>
-          <p:cNvPr id="5" name="장식"/>
-          <p:cNvSpPr/>
-          <p:nvPr/>
-        </p:nvSpPr>
-        <p:spPr>
-          <a:xfrm>
-            <a:off x="10719511" y="737006"/>
-            <a:ext cx="1207008" cy="301752"/>
-          </a:xfrm>
-          <a:prstGeom prst="wave">
-            <a:avLst/>
-          </a:prstGeom>
-          <a:solidFill>
-            <a:srgbClr val="25799D"/>
-          </a:solidFill>
-          <a:ln>
-            <a:noFill/>
-          </a:ln>
-        </p:spPr>
-        <p:txBody>
-          <a:bodyPr rtlCol="0" anchor="ctr"/>
-          <a:lstStyle/>
-          <a:p>
-            <a:pPr algn="ctr"/>
-          </a:p>
-        </p:txBody>
-      </p:sp>
-      <p:sp>
-        <p:nvSpPr>
-          <p:cNvPr id="6" name="장식"/>
-          <p:cNvSpPr/>
-          <p:nvPr/>
-        </p:nvSpPr>
-        <p:spPr>
-          <a:xfrm>
-            <a:off x="10719511" y="998524"/>
-            <a:ext cx="1207008" cy="301752"/>
-          </a:xfrm>
-          <a:prstGeom prst="wave">
-            <a:avLst/>
-          </a:prstGeom>
-          <a:solidFill>
-            <a:srgbClr val="913B4C"/>
-          </a:solidFill>
-          <a:ln>
-            <a:noFill/>
-          </a:ln>
-        </p:spPr>
-        <p:txBody>
-          <a:bodyPr rtlCol="0" anchor="ctr"/>
-          <a:lstStyle/>
-          <a:p>
-            <a:pPr algn="ctr"/>
-          </a:p>
-        </p:txBody>
-      </p:sp>
-      <p:sp>
-        <p:nvSpPr>
           <p:cNvPr id="2" name="Title 1"/>
           <p:cNvSpPr>
             <a:spLocks noGrp="1"/>
@@ -5623,7 +5233,7 @@
       </p:sp>
       <p:sp>
         <p:nvSpPr>
-          <p:cNvPr id="7" name="줄 1"/>
+          <p:cNvPr id="4" name="줄 1"/>
           <p:cNvSpPr/>
           <p:nvPr/>
         </p:nvSpPr>
@@ -5656,7 +5266,7 @@
       </p:sp>
       <p:sp>
         <p:nvSpPr>
-          <p:cNvPr id="8" name="번호 1"/>
+          <p:cNvPr id="5" name="번호 1"/>
           <p:cNvSpPr/>
           <p:nvPr/>
         </p:nvSpPr>
@@ -5699,7 +5309,7 @@
       </p:sp>
       <p:sp>
         <p:nvSpPr>
-          <p:cNvPr id="9" name="TextBox 8"/>
+          <p:cNvPr id="6" name="TextBox 5"/>
           <p:cNvSpPr txBox="1"/>
           <p:nvPr/>
         </p:nvSpPr>
@@ -5737,7 +5347,7 @@
       </p:sp>
       <p:sp>
         <p:nvSpPr>
-          <p:cNvPr id="10" name="TextBox 9"/>
+          <p:cNvPr id="7" name="TextBox 6"/>
           <p:cNvSpPr txBox="1"/>
           <p:nvPr/>
         </p:nvSpPr>
@@ -5775,7 +5385,7 @@
       </p:sp>
       <p:sp>
         <p:nvSpPr>
-          <p:cNvPr id="11" name="줄 2"/>
+          <p:cNvPr id="8" name="줄 2"/>
           <p:cNvSpPr/>
           <p:nvPr/>
         </p:nvSpPr>
@@ -5808,7 +5418,7 @@
       </p:sp>
       <p:sp>
         <p:nvSpPr>
-          <p:cNvPr id="12" name="번호 2"/>
+          <p:cNvPr id="9" name="번호 2"/>
           <p:cNvSpPr/>
           <p:nvPr/>
         </p:nvSpPr>
@@ -5851,7 +5461,7 @@
       </p:sp>
       <p:sp>
         <p:nvSpPr>
-          <p:cNvPr id="13" name="TextBox 12"/>
+          <p:cNvPr id="10" name="TextBox 9"/>
           <p:cNvSpPr txBox="1"/>
           <p:nvPr/>
         </p:nvSpPr>
@@ -5889,7 +5499,7 @@
       </p:sp>
       <p:sp>
         <p:nvSpPr>
-          <p:cNvPr id="14" name="TextBox 13"/>
+          <p:cNvPr id="11" name="TextBox 10"/>
           <p:cNvSpPr txBox="1"/>
           <p:nvPr/>
         </p:nvSpPr>
@@ -5927,7 +5537,7 @@
       </p:sp>
       <p:sp>
         <p:nvSpPr>
-          <p:cNvPr id="15" name="줄 3"/>
+          <p:cNvPr id="12" name="줄 3"/>
           <p:cNvSpPr/>
           <p:nvPr/>
         </p:nvSpPr>
@@ -5960,7 +5570,7 @@
       </p:sp>
       <p:sp>
         <p:nvSpPr>
-          <p:cNvPr id="16" name="번호 3"/>
+          <p:cNvPr id="13" name="번호 3"/>
           <p:cNvSpPr/>
           <p:nvPr/>
         </p:nvSpPr>
@@ -6003,7 +5613,7 @@
       </p:sp>
       <p:sp>
         <p:nvSpPr>
-          <p:cNvPr id="17" name="TextBox 16"/>
+          <p:cNvPr id="14" name="TextBox 13"/>
           <p:cNvSpPr txBox="1"/>
           <p:nvPr/>
         </p:nvSpPr>
@@ -6041,7 +5651,7 @@
       </p:sp>
       <p:sp>
         <p:nvSpPr>
-          <p:cNvPr id="18" name="TextBox 17"/>
+          <p:cNvPr id="15" name="TextBox 14"/>
           <p:cNvSpPr txBox="1"/>
           <p:nvPr/>
         </p:nvSpPr>
@@ -6134,93 +5744,6 @@
       </p:sp>
       <p:sp>
         <p:nvSpPr>
-          <p:cNvPr id="4" name="장식"/>
-          <p:cNvSpPr/>
-          <p:nvPr/>
-        </p:nvSpPr>
-        <p:spPr>
-          <a:xfrm>
-            <a:off x="10719511" y="475488"/>
-            <a:ext cx="1207008" cy="301752"/>
-          </a:xfrm>
-          <a:prstGeom prst="wave">
-            <a:avLst/>
-          </a:prstGeom>
-          <a:solidFill>
-            <a:srgbClr val="CCE9F5"/>
-          </a:solidFill>
-          <a:ln>
-            <a:noFill/>
-          </a:ln>
-        </p:spPr>
-        <p:txBody>
-          <a:bodyPr rtlCol="0" anchor="ctr"/>
-          <a:lstStyle/>
-          <a:p>
-            <a:pPr algn="ctr"/>
-          </a:p>
-        </p:txBody>
-      </p:sp>
-      <p:sp>
-        <p:nvSpPr>
-          <p:cNvPr id="5" name="장식"/>
-          <p:cNvSpPr/>
-          <p:nvPr/>
-        </p:nvSpPr>
-        <p:spPr>
-          <a:xfrm>
-            <a:off x="10719511" y="737006"/>
-            <a:ext cx="1207008" cy="301752"/>
-          </a:xfrm>
-          <a:prstGeom prst="wave">
-            <a:avLst/>
-          </a:prstGeom>
-          <a:solidFill>
-            <a:srgbClr val="25799D"/>
-          </a:solidFill>
-          <a:ln>
-            <a:noFill/>
-          </a:ln>
-        </p:spPr>
-        <p:txBody>
-          <a:bodyPr rtlCol="0" anchor="ctr"/>
-          <a:lstStyle/>
-          <a:p>
-            <a:pPr algn="ctr"/>
-          </a:p>
-        </p:txBody>
-      </p:sp>
-      <p:sp>
-        <p:nvSpPr>
-          <p:cNvPr id="6" name="장식"/>
-          <p:cNvSpPr/>
-          <p:nvPr/>
-        </p:nvSpPr>
-        <p:spPr>
-          <a:xfrm>
-            <a:off x="10719511" y="998524"/>
-            <a:ext cx="1207008" cy="301752"/>
-          </a:xfrm>
-          <a:prstGeom prst="wave">
-            <a:avLst/>
-          </a:prstGeom>
-          <a:solidFill>
-            <a:srgbClr val="913B4C"/>
-          </a:solidFill>
-          <a:ln>
-            <a:noFill/>
-          </a:ln>
-        </p:spPr>
-        <p:txBody>
-          <a:bodyPr rtlCol="0" anchor="ctr"/>
-          <a:lstStyle/>
-          <a:p>
-            <a:pPr algn="ctr"/>
-          </a:p>
-        </p:txBody>
-      </p:sp>
-      <p:sp>
-        <p:nvSpPr>
           <p:cNvPr id="2" name="Title 1"/>
           <p:cNvSpPr>
             <a:spLocks noGrp="1"/>
@@ -6259,7 +5782,7 @@
       </p:sp>
       <p:sp>
         <p:nvSpPr>
-          <p:cNvPr id="7" name="사진 자리"/>
+          <p:cNvPr id="4" name="사진 자리"/>
           <p:cNvSpPr/>
           <p:nvPr/>
         </p:nvSpPr>
@@ -6307,7 +5830,7 @@
       </p:sp>
       <p:sp>
         <p:nvSpPr>
-          <p:cNvPr id="8" name="사진 자리"/>
+          <p:cNvPr id="5" name="사진 자리"/>
           <p:cNvSpPr/>
           <p:nvPr/>
         </p:nvSpPr>
@@ -6355,7 +5878,7 @@
       </p:sp>
       <p:sp>
         <p:nvSpPr>
-          <p:cNvPr id="9" name="사진 자리"/>
+          <p:cNvPr id="6" name="사진 자리"/>
           <p:cNvSpPr/>
           <p:nvPr/>
         </p:nvSpPr>
@@ -6403,7 +5926,7 @@
       </p:sp>
       <p:sp>
         <p:nvSpPr>
-          <p:cNvPr id="10" name="사진 자리"/>
+          <p:cNvPr id="7" name="사진 자리"/>
           <p:cNvSpPr/>
           <p:nvPr/>
         </p:nvSpPr>
@@ -6451,7 +5974,7 @@
       </p:sp>
       <p:sp>
         <p:nvSpPr>
-          <p:cNvPr id="11" name="사진 자리"/>
+          <p:cNvPr id="8" name="사진 자리"/>
           <p:cNvSpPr/>
           <p:nvPr/>
         </p:nvSpPr>
@@ -6499,7 +6022,7 @@
       </p:sp>
       <p:sp>
         <p:nvSpPr>
-          <p:cNvPr id="12" name="사진 자리"/>
+          <p:cNvPr id="9" name="사진 자리"/>
           <p:cNvSpPr/>
           <p:nvPr/>
         </p:nvSpPr>
@@ -6556,14 +6079,6 @@
 <file path=ppt/slides/slide6.xml><?xml version="1.0" encoding="utf-8"?>
 <p:sld xmlns:a="http://schemas.openxmlformats.org/drawingml/2006/main" xmlns:p="http://schemas.openxmlformats.org/presentationml/2006/main" xmlns:r="http://schemas.openxmlformats.org/officeDocument/2006/relationships">
   <p:cSld>
-    <p:bg>
-      <p:bgPr>
-        <a:solidFill>
-          <a:srgbClr val="FFFFFF"/>
-        </a:solidFill>
-        <a:effectLst/>
-      </p:bgPr>
-    </p:bg>
     <p:spTree>
       <p:nvGrpSpPr>
         <p:cNvPr id="1" name=""/>
@@ -6571,151 +6086,30 @@
         <p:nvPr/>
       </p:nvGrpSpPr>
       <p:grpSpPr/>
-      <p:sp>
-        <p:nvSpPr>
-          <p:cNvPr id="3" name="장식"/>
-          <p:cNvSpPr/>
+      <p:pic>
+        <p:nvPicPr>
+          <p:cNvPr id="3" name="표지 그림" descr="family-18.jpg"/>
+          <p:cNvPicPr>
+            <a:picLocks noChangeAspect="1"/>
+          </p:cNvPicPr>
           <p:nvPr/>
-        </p:nvSpPr>
-        <p:spPr>
-          <a:xfrm>
-            <a:off x="0" y="2057400"/>
-            <a:ext cx="10241023" cy="1828800"/>
-          </a:xfrm>
-          <a:prstGeom prst="homePlate">
-            <a:avLst/>
-          </a:prstGeom>
-          <a:solidFill>
-            <a:srgbClr val="25799D"/>
-          </a:solidFill>
-          <a:ln>
-            <a:noFill/>
-          </a:ln>
-        </p:spPr>
-        <p:txBody>
-          <a:bodyPr rtlCol="0" anchor="ctr"/>
-          <a:lstStyle/>
-          <a:p>
-            <a:pPr algn="ctr"/>
-          </a:p>
-        </p:txBody>
-      </p:sp>
-      <p:sp>
-        <p:nvSpPr>
-          <p:cNvPr id="4" name="장식"/>
-          <p:cNvSpPr/>
-          <p:nvPr/>
-        </p:nvSpPr>
-        <p:spPr>
-          <a:xfrm>
-            <a:off x="0" y="3886200"/>
-            <a:ext cx="9509522" cy="64008"/>
+        </p:nvPicPr>
+        <p:blipFill>
+          <a:blip r:embed="rId2"/>
+          <a:stretch>
+            <a:fillRect/>
+          </a:stretch>
+        </p:blipFill>
+        <p:spPr>
+          <a:xfrm>
+            <a:off x="0" y="0"/>
+            <a:ext cx="12191695" cy="6858000"/>
           </a:xfrm>
           <a:prstGeom prst="rect">
             <a:avLst/>
           </a:prstGeom>
-          <a:solidFill>
-            <a:srgbClr val="913B4C"/>
-          </a:solidFill>
-          <a:ln>
-            <a:noFill/>
-          </a:ln>
-        </p:spPr>
-        <p:txBody>
-          <a:bodyPr rtlCol="0" anchor="ctr"/>
-          <a:lstStyle/>
-          <a:p>
-            <a:pPr algn="ctr"/>
-          </a:p>
-        </p:txBody>
-      </p:sp>
-      <p:sp>
-        <p:nvSpPr>
-          <p:cNvPr id="5" name="장식"/>
-          <p:cNvSpPr/>
-          <p:nvPr/>
-        </p:nvSpPr>
-        <p:spPr>
-          <a:xfrm>
-            <a:off x="9329659" y="672084"/>
-            <a:ext cx="2798064" cy="699516"/>
-          </a:xfrm>
-          <a:prstGeom prst="wave">
-            <a:avLst/>
-          </a:prstGeom>
-          <a:solidFill>
-            <a:srgbClr val="CCE9F5"/>
-          </a:solidFill>
-          <a:ln>
-            <a:noFill/>
-          </a:ln>
-        </p:spPr>
-        <p:txBody>
-          <a:bodyPr rtlCol="0" anchor="ctr"/>
-          <a:lstStyle/>
-          <a:p>
-            <a:pPr algn="ctr"/>
-          </a:p>
-        </p:txBody>
-      </p:sp>
-      <p:sp>
-        <p:nvSpPr>
-          <p:cNvPr id="6" name="장식"/>
-          <p:cNvSpPr/>
-          <p:nvPr/>
-        </p:nvSpPr>
-        <p:spPr>
-          <a:xfrm>
-            <a:off x="9329659" y="1278331"/>
-            <a:ext cx="2798064" cy="699516"/>
-          </a:xfrm>
-          <a:prstGeom prst="wave">
-            <a:avLst/>
-          </a:prstGeom>
-          <a:solidFill>
-            <a:srgbClr val="25799D"/>
-          </a:solidFill>
-          <a:ln>
-            <a:noFill/>
-          </a:ln>
-        </p:spPr>
-        <p:txBody>
-          <a:bodyPr rtlCol="0" anchor="ctr"/>
-          <a:lstStyle/>
-          <a:p>
-            <a:pPr algn="ctr"/>
-          </a:p>
-        </p:txBody>
-      </p:sp>
-      <p:sp>
-        <p:nvSpPr>
-          <p:cNvPr id="7" name="장식"/>
-          <p:cNvSpPr/>
-          <p:nvPr/>
-        </p:nvSpPr>
-        <p:spPr>
-          <a:xfrm>
-            <a:off x="9329659" y="1884578"/>
-            <a:ext cx="2798064" cy="699516"/>
-          </a:xfrm>
-          <a:prstGeom prst="wave">
-            <a:avLst/>
-          </a:prstGeom>
-          <a:solidFill>
-            <a:srgbClr val="913B4C"/>
-          </a:solidFill>
-          <a:ln>
-            <a:noFill/>
-          </a:ln>
-        </p:spPr>
-        <p:txBody>
-          <a:bodyPr rtlCol="0" anchor="ctr"/>
-          <a:lstStyle/>
-          <a:p>
-            <a:pPr algn="ctr"/>
-          </a:p>
-        </p:txBody>
-      </p:sp>
+        </p:spPr>
+      </p:pic>
       <p:sp>
         <p:nvSpPr>
           <p:cNvPr id="2" name="Title 1"/>
@@ -6728,8 +6122,8 @@
         </p:nvSpPr>
         <p:spPr>
           <a:xfrm>
-            <a:off x="731501" y="2167128"/>
-            <a:ext cx="8778020" cy="1609344"/>
+            <a:off x="853418" y="2057400"/>
+            <a:ext cx="6095847" cy="1554480"/>
           </a:xfrm>
         </p:spPr>
         <p:txBody>
@@ -6746,24 +6140,24 @@
             <a:r>
               <a:rPr sz="3600" b="1" i="0">
                 <a:solidFill>
-                  <a:srgbClr val="FFFFFF"/>
-                </a:solidFill>
-              </a:rPr>
-              <a:t>우리 가족을 소개했어요</a:t>
-            </a:r>
-          </a:p>
-        </p:txBody>
-      </p:sp>
-      <p:sp>
-        <p:nvSpPr>
-          <p:cNvPr id="8" name="한 줄 문구"/>
+                  <a:srgbClr val="11394A"/>
+                </a:solidFill>
+              </a:rPr>
+              <a:t>우리 가족 소개를 마칩니다</a:t>
+            </a:r>
+          </a:p>
+        </p:txBody>
+      </p:sp>
+      <p:sp>
+        <p:nvSpPr>
+          <p:cNvPr id="4" name="한 줄 문구"/>
           <p:cNvSpPr txBox="1"/>
           <p:nvPr/>
         </p:nvSpPr>
         <p:spPr>
           <a:xfrm>
-            <a:off x="731501" y="4160520"/>
-            <a:ext cx="8534186" cy="822960"/>
+            <a:off x="853418" y="3749039"/>
+            <a:ext cx="6095847" cy="822960"/>
           </a:xfrm>
           <a:prstGeom prst="rect">
             <a:avLst/>
@@ -6787,21 +6181,21 @@
                   <a:srgbClr val="11394A"/>
                 </a:solidFill>
               </a:rPr>
-              <a:t>함께여서 늘 든든합니다</a:t>
-            </a:r>
-          </a:p>
-        </p:txBody>
-      </p:sp>
-      <p:sp>
-        <p:nvSpPr>
-          <p:cNvPr id="9" name="안내 문구"/>
+              <a:t>읽어 주셔서 고맙습니다</a:t>
+            </a:r>
+          </a:p>
+        </p:txBody>
+      </p:sp>
+      <p:sp>
+        <p:nvSpPr>
+          <p:cNvPr id="5" name="안내 문구"/>
           <p:cNvSpPr txBox="1"/>
           <p:nvPr/>
         </p:nvSpPr>
         <p:spPr>
           <a:xfrm>
-            <a:off x="731501" y="5029200"/>
-            <a:ext cx="8534186" cy="914400"/>
+            <a:off x="853418" y="4617720"/>
+            <a:ext cx="6095847" cy="914400"/>
           </a:xfrm>
           <a:prstGeom prst="rect">
             <a:avLst/>

--- a/public/fun/pack/pptx/family/가족소개_18_3대가족_바닷가등대.pptx
+++ b/public/fun/pack/pptx/family/가족소개_18_3대가족_바닷가등대.pptx
@@ -3347,7 +3347,7 @@
             <a:r>
               <a:rPr sz="3600" b="1" i="0">
                 <a:solidFill>
-                  <a:srgbClr val="11394A"/>
+                  <a:srgbClr val="11485F"/>
                 </a:solidFill>
               </a:rPr>
               <a:t>우리 가족을 소개합니다</a:t>
@@ -3385,7 +3385,7 @@
             <a:r>
               <a:rPr sz="1700" b="0" i="1">
                 <a:solidFill>
-                  <a:srgbClr val="11394A"/>
+                  <a:srgbClr val="11485F"/>
                 </a:solidFill>
               </a:rPr>
               <a:t>바닷가 등대까지 걸어간 여름휴가</a:t>
@@ -3472,7 +3472,7 @@
             <a:avLst/>
           </a:prstGeom>
           <a:solidFill>
-            <a:srgbClr val="25799D"/>
+            <a:srgbClr val="2695C5"/>
           </a:solidFill>
           <a:ln>
             <a:noFill/>
@@ -3539,11 +3539,11 @@
             <a:avLst/>
           </a:prstGeom>
           <a:solidFill>
-            <a:srgbClr val="CCE9F5"/>
+            <a:srgbClr val="D1EEFA"/>
           </a:solidFill>
           <a:ln w="19050">
             <a:solidFill>
-              <a:srgbClr val="25799D"/>
+              <a:srgbClr val="2695C5"/>
             </a:solidFill>
             <a:prstDash val="dash"/>
           </a:ln>
@@ -3562,7 +3562,7 @@
             <a:r>
               <a:rPr sz="1200" b="0" i="0">
                 <a:solidFill>
-                  <a:srgbClr val="11394A"/>
+                  <a:srgbClr val="11485F"/>
                 </a:solidFill>
               </a:rPr>
               <a:t>사진</a:t>
@@ -3600,7 +3600,7 @@
             <a:r>
               <a:rPr sz="1600" b="1" i="0">
                 <a:solidFill>
-                  <a:srgbClr val="11394A"/>
+                  <a:srgbClr val="11485F"/>
                 </a:solidFill>
               </a:rPr>
               <a:t>할아버지</a:t>
@@ -3691,11 +3691,11 @@
             <a:avLst/>
           </a:prstGeom>
           <a:solidFill>
-            <a:srgbClr val="CCE9F5"/>
+            <a:srgbClr val="D1EEFA"/>
           </a:solidFill>
           <a:ln w="19050">
             <a:solidFill>
-              <a:srgbClr val="25799D"/>
+              <a:srgbClr val="2695C5"/>
             </a:solidFill>
             <a:prstDash val="dash"/>
           </a:ln>
@@ -3714,7 +3714,7 @@
             <a:r>
               <a:rPr sz="1200" b="0" i="0">
                 <a:solidFill>
-                  <a:srgbClr val="11394A"/>
+                  <a:srgbClr val="11485F"/>
                 </a:solidFill>
               </a:rPr>
               <a:t>사진</a:t>
@@ -3752,7 +3752,7 @@
             <a:r>
               <a:rPr sz="1600" b="1" i="0">
                 <a:solidFill>
-                  <a:srgbClr val="11394A"/>
+                  <a:srgbClr val="11485F"/>
                 </a:solidFill>
               </a:rPr>
               <a:t>할머니</a:t>
@@ -3843,11 +3843,11 @@
             <a:avLst/>
           </a:prstGeom>
           <a:solidFill>
-            <a:srgbClr val="CCE9F5"/>
+            <a:srgbClr val="D1EEFA"/>
           </a:solidFill>
           <a:ln w="19050">
             <a:solidFill>
-              <a:srgbClr val="25799D"/>
+              <a:srgbClr val="2695C5"/>
             </a:solidFill>
             <a:prstDash val="dash"/>
           </a:ln>
@@ -3866,7 +3866,7 @@
             <a:r>
               <a:rPr sz="1200" b="0" i="0">
                 <a:solidFill>
-                  <a:srgbClr val="11394A"/>
+                  <a:srgbClr val="11485F"/>
                 </a:solidFill>
               </a:rPr>
               <a:t>사진</a:t>
@@ -3904,7 +3904,7 @@
             <a:r>
               <a:rPr sz="1600" b="1" i="0">
                 <a:solidFill>
-                  <a:srgbClr val="11394A"/>
+                  <a:srgbClr val="11485F"/>
                 </a:solidFill>
               </a:rPr>
               <a:t>아빠</a:t>
@@ -3995,11 +3995,11 @@
             <a:avLst/>
           </a:prstGeom>
           <a:solidFill>
-            <a:srgbClr val="CCE9F5"/>
+            <a:srgbClr val="D1EEFA"/>
           </a:solidFill>
           <a:ln w="19050">
             <a:solidFill>
-              <a:srgbClr val="25799D"/>
+              <a:srgbClr val="2695C5"/>
             </a:solidFill>
             <a:prstDash val="dash"/>
           </a:ln>
@@ -4018,7 +4018,7 @@
             <a:r>
               <a:rPr sz="1200" b="0" i="0">
                 <a:solidFill>
-                  <a:srgbClr val="11394A"/>
+                  <a:srgbClr val="11485F"/>
                 </a:solidFill>
               </a:rPr>
               <a:t>사진</a:t>
@@ -4056,7 +4056,7 @@
             <a:r>
               <a:rPr sz="1600" b="1" i="0">
                 <a:solidFill>
-                  <a:srgbClr val="11394A"/>
+                  <a:srgbClr val="11485F"/>
                 </a:solidFill>
               </a:rPr>
               <a:t>엄마</a:t>
@@ -4147,11 +4147,11 @@
             <a:avLst/>
           </a:prstGeom>
           <a:solidFill>
-            <a:srgbClr val="CCE9F5"/>
+            <a:srgbClr val="D1EEFA"/>
           </a:solidFill>
           <a:ln w="19050">
             <a:solidFill>
-              <a:srgbClr val="25799D"/>
+              <a:srgbClr val="2695C5"/>
             </a:solidFill>
             <a:prstDash val="dash"/>
           </a:ln>
@@ -4170,7 +4170,7 @@
             <a:r>
               <a:rPr sz="1200" b="0" i="0">
                 <a:solidFill>
-                  <a:srgbClr val="11394A"/>
+                  <a:srgbClr val="11485F"/>
                 </a:solidFill>
               </a:rPr>
               <a:t>사진</a:t>
@@ -4208,7 +4208,7 @@
             <a:r>
               <a:rPr sz="1600" b="1" i="0">
                 <a:solidFill>
-                  <a:srgbClr val="11394A"/>
+                  <a:srgbClr val="11485F"/>
                 </a:solidFill>
               </a:rPr>
               <a:t>큰아이</a:t>
@@ -4299,11 +4299,11 @@
             <a:avLst/>
           </a:prstGeom>
           <a:solidFill>
-            <a:srgbClr val="CCE9F5"/>
+            <a:srgbClr val="D1EEFA"/>
           </a:solidFill>
           <a:ln w="19050">
             <a:solidFill>
-              <a:srgbClr val="25799D"/>
+              <a:srgbClr val="2695C5"/>
             </a:solidFill>
             <a:prstDash val="dash"/>
           </a:ln>
@@ -4322,7 +4322,7 @@
             <a:r>
               <a:rPr sz="1200" b="0" i="0">
                 <a:solidFill>
-                  <a:srgbClr val="11394A"/>
+                  <a:srgbClr val="11485F"/>
                 </a:solidFill>
               </a:rPr>
               <a:t>사진</a:t>
@@ -4360,7 +4360,7 @@
             <a:r>
               <a:rPr sz="1600" b="1" i="0">
                 <a:solidFill>
-                  <a:srgbClr val="11394A"/>
+                  <a:srgbClr val="11485F"/>
                 </a:solidFill>
               </a:rPr>
               <a:t>작은아이</a:t>
@@ -4477,7 +4477,7 @@
             <a:avLst/>
           </a:prstGeom>
           <a:solidFill>
-            <a:srgbClr val="25799D"/>
+            <a:srgbClr val="2695C5"/>
           </a:solidFill>
           <a:ln>
             <a:noFill/>
@@ -4544,7 +4544,7 @@
             <a:avLst/>
           </a:prstGeom>
           <a:solidFill>
-            <a:srgbClr val="CCE9F5"/>
+            <a:srgbClr val="D1EEFA"/>
           </a:solidFill>
           <a:ln>
             <a:noFill/>
@@ -4573,7 +4573,7 @@
             <a:avLst/>
           </a:prstGeom>
           <a:solidFill>
-            <a:srgbClr val="25799D"/>
+            <a:srgbClr val="2695C5"/>
           </a:solidFill>
           <a:ln w="38100">
             <a:solidFill>
@@ -4619,7 +4619,7 @@
             <a:r>
               <a:rPr sz="1600" b="1" i="0">
                 <a:solidFill>
-                  <a:srgbClr val="25799D"/>
+                  <a:srgbClr val="2695C5"/>
                 </a:solidFill>
               </a:rPr>
               <a:t>할아버지 할머니의 이야기</a:t>
@@ -4657,7 +4657,7 @@
             <a:r>
               <a:rPr sz="1800" b="1" i="0">
                 <a:solidFill>
-                  <a:srgbClr val="11394A"/>
+                  <a:srgbClr val="11485F"/>
                 </a:solidFill>
               </a:rPr>
               <a:t>뿌리</a:t>
@@ -4718,7 +4718,7 @@
             <a:avLst/>
           </a:prstGeom>
           <a:solidFill>
-            <a:srgbClr val="25799D"/>
+            <a:srgbClr val="2695C5"/>
           </a:solidFill>
           <a:ln w="38100">
             <a:solidFill>
@@ -4764,7 +4764,7 @@
             <a:r>
               <a:rPr sz="1600" b="1" i="0">
                 <a:solidFill>
-                  <a:srgbClr val="25799D"/>
+                  <a:srgbClr val="2695C5"/>
                 </a:solidFill>
               </a:rPr>
               <a:t>부모가 된 날</a:t>
@@ -4802,7 +4802,7 @@
             <a:r>
               <a:rPr sz="1800" b="1" i="0">
                 <a:solidFill>
-                  <a:srgbClr val="11394A"/>
+                  <a:srgbClr val="11485F"/>
                 </a:solidFill>
               </a:rPr>
               <a:t>새로운 가지</a:t>
@@ -4863,7 +4863,7 @@
             <a:avLst/>
           </a:prstGeom>
           <a:solidFill>
-            <a:srgbClr val="25799D"/>
+            <a:srgbClr val="2695C5"/>
           </a:solidFill>
           <a:ln w="38100">
             <a:solidFill>
@@ -4909,7 +4909,7 @@
             <a:r>
               <a:rPr sz="1600" b="1" i="0">
                 <a:solidFill>
-                  <a:srgbClr val="25799D"/>
+                  <a:srgbClr val="2695C5"/>
                 </a:solidFill>
               </a:rPr>
               <a:t>온 가족 모임</a:t>
@@ -4947,7 +4947,7 @@
             <a:r>
               <a:rPr sz="1800" b="1" i="0">
                 <a:solidFill>
-                  <a:srgbClr val="11394A"/>
+                  <a:srgbClr val="11485F"/>
                 </a:solidFill>
               </a:rPr>
               <a:t>한자리에 모인 날</a:t>
@@ -5008,7 +5008,7 @@
             <a:avLst/>
           </a:prstGeom>
           <a:solidFill>
-            <a:srgbClr val="25799D"/>
+            <a:srgbClr val="2695C5"/>
           </a:solidFill>
           <a:ln w="38100">
             <a:solidFill>
@@ -5054,7 +5054,7 @@
             <a:r>
               <a:rPr sz="1600" b="1" i="0">
                 <a:solidFill>
-                  <a:srgbClr val="25799D"/>
+                  <a:srgbClr val="2695C5"/>
                 </a:solidFill>
               </a:rPr>
               <a:t>지금</a:t>
@@ -5092,7 +5092,7 @@
             <a:r>
               <a:rPr sz="1800" b="1" i="0">
                 <a:solidFill>
-                  <a:srgbClr val="11394A"/>
+                  <a:srgbClr val="11485F"/>
                 </a:solidFill>
               </a:rPr>
               <a:t>오늘의 우리</a:t>
@@ -5179,7 +5179,7 @@
             <a:avLst/>
           </a:prstGeom>
           <a:solidFill>
-            <a:srgbClr val="25799D"/>
+            <a:srgbClr val="2695C5"/>
           </a:solidFill>
           <a:ln>
             <a:noFill/>
@@ -5248,11 +5248,11 @@
             </a:avLst>
           </a:prstGeom>
           <a:solidFill>
-            <a:srgbClr val="EEF7FB"/>
+            <a:srgbClr val="EEF8FC"/>
           </a:solidFill>
           <a:ln w="12700">
             <a:solidFill>
-              <a:srgbClr val="CCE9F5"/>
+              <a:srgbClr val="D1EEFA"/>
             </a:solidFill>
           </a:ln>
         </p:spPr>
@@ -5279,7 +5279,7 @@
             <a:avLst/>
           </a:prstGeom>
           <a:solidFill>
-            <a:srgbClr val="25799D"/>
+            <a:srgbClr val="2695C5"/>
           </a:solidFill>
           <a:ln>
             <a:noFill/>
@@ -5337,7 +5337,7 @@
             <a:r>
               <a:rPr sz="1800" b="1" i="0">
                 <a:solidFill>
-                  <a:srgbClr val="11394A"/>
+                  <a:srgbClr val="11485F"/>
                 </a:solidFill>
               </a:rPr>
               <a:t>약속 1</a:t>
@@ -5400,11 +5400,11 @@
             </a:avLst>
           </a:prstGeom>
           <a:solidFill>
-            <a:srgbClr val="EEF7FB"/>
+            <a:srgbClr val="EEF8FC"/>
           </a:solidFill>
           <a:ln w="12700">
             <a:solidFill>
-              <a:srgbClr val="CCE9F5"/>
+              <a:srgbClr val="D1EEFA"/>
             </a:solidFill>
           </a:ln>
         </p:spPr>
@@ -5431,7 +5431,7 @@
             <a:avLst/>
           </a:prstGeom>
           <a:solidFill>
-            <a:srgbClr val="25799D"/>
+            <a:srgbClr val="2695C5"/>
           </a:solidFill>
           <a:ln>
             <a:noFill/>
@@ -5489,7 +5489,7 @@
             <a:r>
               <a:rPr sz="1800" b="1" i="0">
                 <a:solidFill>
-                  <a:srgbClr val="11394A"/>
+                  <a:srgbClr val="11485F"/>
                 </a:solidFill>
               </a:rPr>
               <a:t>약속 2</a:t>
@@ -5552,11 +5552,11 @@
             </a:avLst>
           </a:prstGeom>
           <a:solidFill>
-            <a:srgbClr val="EEF7FB"/>
+            <a:srgbClr val="EEF8FC"/>
           </a:solidFill>
           <a:ln w="12700">
             <a:solidFill>
-              <a:srgbClr val="CCE9F5"/>
+              <a:srgbClr val="D1EEFA"/>
             </a:solidFill>
           </a:ln>
         </p:spPr>
@@ -5583,7 +5583,7 @@
             <a:avLst/>
           </a:prstGeom>
           <a:solidFill>
-            <a:srgbClr val="25799D"/>
+            <a:srgbClr val="2695C5"/>
           </a:solidFill>
           <a:ln>
             <a:noFill/>
@@ -5641,7 +5641,7 @@
             <a:r>
               <a:rPr sz="1800" b="1" i="0">
                 <a:solidFill>
-                  <a:srgbClr val="11394A"/>
+                  <a:srgbClr val="11485F"/>
                 </a:solidFill>
               </a:rPr>
               <a:t>약속 3</a:t>
@@ -5728,7 +5728,7 @@
             <a:avLst/>
           </a:prstGeom>
           <a:solidFill>
-            <a:srgbClr val="25799D"/>
+            <a:srgbClr val="2695C5"/>
           </a:solidFill>
           <a:ln>
             <a:noFill/>
@@ -5797,11 +5797,11 @@
             </a:avLst>
           </a:prstGeom>
           <a:solidFill>
-            <a:srgbClr val="CCE9F5"/>
+            <a:srgbClr val="D1EEFA"/>
           </a:solidFill>
           <a:ln w="19050">
             <a:solidFill>
-              <a:srgbClr val="25799D"/>
+              <a:srgbClr val="2695C5"/>
             </a:solidFill>
             <a:prstDash val="dash"/>
           </a:ln>
@@ -5820,7 +5820,7 @@
             <a:r>
               <a:rPr sz="1200" b="0" i="0">
                 <a:solidFill>
-                  <a:srgbClr val="11394A"/>
+                  <a:srgbClr val="11485F"/>
                 </a:solidFill>
               </a:rPr>
               <a:t>사진 1</a:t>
@@ -5845,11 +5845,11 @@
             </a:avLst>
           </a:prstGeom>
           <a:solidFill>
-            <a:srgbClr val="CCE9F5"/>
+            <a:srgbClr val="D1EEFA"/>
           </a:solidFill>
           <a:ln w="19050">
             <a:solidFill>
-              <a:srgbClr val="25799D"/>
+              <a:srgbClr val="2695C5"/>
             </a:solidFill>
             <a:prstDash val="dash"/>
           </a:ln>
@@ -5868,7 +5868,7 @@
             <a:r>
               <a:rPr sz="1200" b="0" i="0">
                 <a:solidFill>
-                  <a:srgbClr val="11394A"/>
+                  <a:srgbClr val="11485F"/>
                 </a:solidFill>
               </a:rPr>
               <a:t>사진 2</a:t>
@@ -5893,11 +5893,11 @@
             </a:avLst>
           </a:prstGeom>
           <a:solidFill>
-            <a:srgbClr val="CCE9F5"/>
+            <a:srgbClr val="D1EEFA"/>
           </a:solidFill>
           <a:ln w="19050">
             <a:solidFill>
-              <a:srgbClr val="25799D"/>
+              <a:srgbClr val="2695C5"/>
             </a:solidFill>
             <a:prstDash val="dash"/>
           </a:ln>
@@ -5916,7 +5916,7 @@
             <a:r>
               <a:rPr sz="1200" b="0" i="0">
                 <a:solidFill>
-                  <a:srgbClr val="11394A"/>
+                  <a:srgbClr val="11485F"/>
                 </a:solidFill>
               </a:rPr>
               <a:t>사진 3</a:t>
@@ -5941,11 +5941,11 @@
             </a:avLst>
           </a:prstGeom>
           <a:solidFill>
-            <a:srgbClr val="CCE9F5"/>
+            <a:srgbClr val="D1EEFA"/>
           </a:solidFill>
           <a:ln w="19050">
             <a:solidFill>
-              <a:srgbClr val="25799D"/>
+              <a:srgbClr val="2695C5"/>
             </a:solidFill>
             <a:prstDash val="dash"/>
           </a:ln>
@@ -5964,7 +5964,7 @@
             <a:r>
               <a:rPr sz="1200" b="0" i="0">
                 <a:solidFill>
-                  <a:srgbClr val="11394A"/>
+                  <a:srgbClr val="11485F"/>
                 </a:solidFill>
               </a:rPr>
               <a:t>사진 4</a:t>
@@ -5989,11 +5989,11 @@
             </a:avLst>
           </a:prstGeom>
           <a:solidFill>
-            <a:srgbClr val="CCE9F5"/>
+            <a:srgbClr val="D1EEFA"/>
           </a:solidFill>
           <a:ln w="19050">
             <a:solidFill>
-              <a:srgbClr val="25799D"/>
+              <a:srgbClr val="2695C5"/>
             </a:solidFill>
             <a:prstDash val="dash"/>
           </a:ln>
@@ -6012,7 +6012,7 @@
             <a:r>
               <a:rPr sz="1200" b="0" i="0">
                 <a:solidFill>
-                  <a:srgbClr val="11394A"/>
+                  <a:srgbClr val="11485F"/>
                 </a:solidFill>
               </a:rPr>
               <a:t>사진 5</a:t>
@@ -6037,11 +6037,11 @@
             </a:avLst>
           </a:prstGeom>
           <a:solidFill>
-            <a:srgbClr val="CCE9F5"/>
+            <a:srgbClr val="D1EEFA"/>
           </a:solidFill>
           <a:ln w="19050">
             <a:solidFill>
-              <a:srgbClr val="25799D"/>
+              <a:srgbClr val="2695C5"/>
             </a:solidFill>
             <a:prstDash val="dash"/>
           </a:ln>
@@ -6060,7 +6060,7 @@
             <a:r>
               <a:rPr sz="1200" b="0" i="0">
                 <a:solidFill>
-                  <a:srgbClr val="11394A"/>
+                  <a:srgbClr val="11485F"/>
                 </a:solidFill>
               </a:rPr>
               <a:t>사진 6</a:t>
@@ -6140,7 +6140,7 @@
             <a:r>
               <a:rPr sz="3600" b="1" i="0">
                 <a:solidFill>
-                  <a:srgbClr val="11394A"/>
+                  <a:srgbClr val="11485F"/>
                 </a:solidFill>
               </a:rPr>
               <a:t>우리 가족 소개를 마칩니다</a:t>
@@ -6178,7 +6178,7 @@
             <a:r>
               <a:rPr sz="1700" b="0" i="1">
                 <a:solidFill>
-                  <a:srgbClr val="11394A"/>
+                  <a:srgbClr val="11485F"/>
                 </a:solidFill>
               </a:rPr>
               <a:t>읽어 주셔서 고맙습니다</a:t>
@@ -6243,34 +6243,34 @@
         <a:sysClr val="window" lastClr="FFFFFF"/>
       </a:lt1>
       <a:dk2>
-        <a:srgbClr val="11394A"/>
+        <a:srgbClr val="11485F"/>
       </a:dk2>
       <a:lt2>
-        <a:srgbClr val="EEF7FB"/>
+        <a:srgbClr val="EEF8FC"/>
       </a:lt2>
       <a:accent1>
-        <a:srgbClr val="25799D"/>
+        <a:srgbClr val="2695C5"/>
       </a:accent1>
       <a:accent2>
-        <a:srgbClr val="913B4C"/>
+        <a:srgbClr val="209DB6"/>
       </a:accent2>
       <a:accent3>
-        <a:srgbClr val="11394A"/>
+        <a:srgbClr val="11485F"/>
       </a:accent3>
       <a:accent4>
-        <a:srgbClr val="CCE9F5"/>
+        <a:srgbClr val="D1EEFA"/>
       </a:accent4>
       <a:accent5>
-        <a:srgbClr val="5B5A74"/>
+        <a:srgbClr val="2399BE"/>
       </a:accent5>
       <a:accent6>
-        <a:srgbClr val="708892"/>
+        <a:srgbClr val="70919F"/>
       </a:accent6>
       <a:hlink>
-        <a:srgbClr val="25799D"/>
+        <a:srgbClr val="2695C5"/>
       </a:hlink>
       <a:folHlink>
-        <a:srgbClr val="11394A"/>
+        <a:srgbClr val="11485F"/>
       </a:folHlink>
     </a:clrScheme>
     <a:fontScheme name="Office">

--- a/public/fun/pack/pptx/family/가족소개_18_3대가족_바닷가등대.pptx
+++ b/public/fun/pack/pptx/family/가족소개_18_3대가족_바닷가등대.pptx
@@ -3286,6 +3286,14 @@
 <file path=ppt/slides/slide1.xml><?xml version="1.0" encoding="utf-8"?>
 <p:sld xmlns:a="http://schemas.openxmlformats.org/drawingml/2006/main" xmlns:p="http://schemas.openxmlformats.org/presentationml/2006/main" xmlns:r="http://schemas.openxmlformats.org/officeDocument/2006/relationships">
   <p:cSld>
+    <p:bg>
+      <p:bgPr>
+        <a:solidFill>
+          <a:srgbClr val="EAF7FD"/>
+        </a:solidFill>
+        <a:effectLst/>
+      </p:bgPr>
+    </p:bg>
     <p:spTree>
       <p:nvGrpSpPr>
         <p:cNvPr id="1" name=""/>
@@ -3293,30 +3301,116 @@
         <p:nvPr/>
       </p:nvGrpSpPr>
       <p:grpSpPr/>
-      <p:pic>
-        <p:nvPicPr>
-          <p:cNvPr id="3" name="표지 그림" descr="family-18.jpg"/>
-          <p:cNvPicPr>
-            <a:picLocks noChangeAspect="1"/>
-          </p:cNvPicPr>
-          <p:nvPr/>
-        </p:nvPicPr>
-        <p:blipFill>
-          <a:blip r:embed="rId2"/>
-          <a:stretch>
-            <a:fillRect/>
-          </a:stretch>
-        </p:blipFill>
+      <p:sp>
+        <p:nvSpPr>
+          <p:cNvPr id="3" name="사진 자리"/>
+          <p:cNvSpPr/>
+          <p:nvPr/>
+        </p:nvSpPr>
         <p:spPr>
           <a:xfrm>
             <a:off x="0" y="0"/>
-            <a:ext cx="12191695" cy="6858000"/>
+            <a:ext cx="4389010" cy="6858000"/>
           </a:xfrm>
           <a:prstGeom prst="rect">
             <a:avLst/>
           </a:prstGeom>
-        </p:spPr>
-      </p:pic>
+          <a:solidFill>
+            <a:srgbClr val="A5DCF3"/>
+          </a:solidFill>
+          <a:ln>
+            <a:noFill/>
+          </a:ln>
+        </p:spPr>
+        <p:txBody>
+          <a:bodyPr rtlCol="0" anchor="ctr" wrap="square" lIns="54864" rIns="54864" tIns="27432" bIns="27432">
+            <a:noAutofit/>
+          </a:bodyPr>
+          <a:lstStyle/>
+          <a:p>
+            <a:pPr algn="ctr">
+              <a:lnSpc>
+                <a:spcPct val="100000"/>
+              </a:lnSpc>
+            </a:pPr>
+            <a:r>
+              <a:rPr sz="1400" b="0" i="0">
+                <a:solidFill>
+                  <a:srgbClr val="273F49"/>
+                </a:solidFill>
+              </a:rPr>
+              <a:t>사진을 넣어 주세요</a:t>
+            </a:r>
+          </a:p>
+        </p:txBody>
+      </p:sp>
+      <p:sp>
+        <p:nvSpPr>
+          <p:cNvPr id="4" name="장식"/>
+          <p:cNvSpPr/>
+          <p:nvPr/>
+        </p:nvSpPr>
+        <p:spPr>
+          <a:xfrm>
+            <a:off x="365750" y="365760"/>
+            <a:ext cx="3657508" cy="6126480"/>
+          </a:xfrm>
+          <a:prstGeom prst="rect">
+            <a:avLst/>
+          </a:prstGeom>
+          <a:noFill/>
+          <a:ln w="9525">
+            <a:solidFill>
+              <a:srgbClr val="26231F"/>
+            </a:solidFill>
+          </a:ln>
+        </p:spPr>
+        <p:txBody>
+          <a:bodyPr rtlCol="0" anchor="ctr"/>
+          <a:lstStyle/>
+          <a:p>
+            <a:pPr algn="ctr"/>
+          </a:p>
+        </p:txBody>
+      </p:sp>
+      <p:sp>
+        <p:nvSpPr>
+          <p:cNvPr id="5" name="라벨"/>
+          <p:cNvSpPr txBox="1"/>
+          <p:nvPr/>
+        </p:nvSpPr>
+        <p:spPr>
+          <a:xfrm>
+            <a:off x="6827349" y="2148840"/>
+            <a:ext cx="4632844" cy="274320"/>
+          </a:xfrm>
+          <a:prstGeom prst="rect">
+            <a:avLst/>
+          </a:prstGeom>
+          <a:noFill/>
+        </p:spPr>
+        <p:txBody>
+          <a:bodyPr wrap="square" lIns="54864" rIns="54864" tIns="27432" bIns="27432" anchor="t">
+            <a:noAutofit/>
+          </a:bodyPr>
+          <a:lstStyle/>
+          <a:p>
+            <a:pPr algn="l">
+              <a:lnSpc>
+                <a:spcPct val="115000"/>
+              </a:lnSpc>
+            </a:pPr>
+            <a:r>
+              <a:rPr sz="1000" b="1" i="0" spc="250">
+                <a:solidFill>
+                  <a:srgbClr val="26231F"/>
+                </a:solidFill>
+              </a:rPr>
+              <a:t>FAMILY ALBUM</a:t>
+            </a:r>
+          </a:p>
+        </p:txBody>
+      </p:sp>
       <p:sp>
         <p:nvSpPr>
           <p:cNvPr id="2" name="Title 1"/>
@@ -3329,8 +3423,8 @@
         </p:nvSpPr>
         <p:spPr>
           <a:xfrm>
-            <a:off x="853418" y="2057400"/>
-            <a:ext cx="6095847" cy="1554480"/>
+            <a:off x="6827349" y="2606040"/>
+            <a:ext cx="4632844" cy="1188720"/>
           </a:xfrm>
         </p:spPr>
         <p:txBody>
@@ -3345,9 +3439,9 @@
               </a:lnSpc>
             </a:pPr>
             <a:r>
-              <a:rPr sz="3600" b="1" i="0">
-                <a:solidFill>
-                  <a:srgbClr val="11485F"/>
+              <a:rPr sz="4000" b="1" i="0">
+                <a:solidFill>
+                  <a:srgbClr val="26231F"/>
                 </a:solidFill>
               </a:rPr>
               <a:t>우리 가족을 소개합니다</a:t>
@@ -3357,14 +3451,14 @@
       </p:sp>
       <p:sp>
         <p:nvSpPr>
-          <p:cNvPr id="4" name="한 줄 문구"/>
+          <p:cNvPr id="6" name="한 줄 문구"/>
           <p:cNvSpPr txBox="1"/>
           <p:nvPr/>
         </p:nvSpPr>
         <p:spPr>
           <a:xfrm>
-            <a:off x="853418" y="3749039"/>
-            <a:ext cx="6095847" cy="822960"/>
+            <a:off x="6827349" y="3886200"/>
+            <a:ext cx="4632844" cy="822960"/>
           </a:xfrm>
           <a:prstGeom prst="rect">
             <a:avLst/>
@@ -3383,26 +3477,26 @@
               </a:lnSpc>
             </a:pPr>
             <a:r>
-              <a:rPr sz="1700" b="0" i="1">
-                <a:solidFill>
-                  <a:srgbClr val="11485F"/>
-                </a:solidFill>
-              </a:rPr>
-              <a:t>바닷가 등대까지 걸어간 여름휴가</a:t>
-            </a:r>
-          </a:p>
-        </p:txBody>
-      </p:sp>
-      <p:sp>
-        <p:nvSpPr>
-          <p:cNvPr id="5" name="안내 문구"/>
+              <a:rPr sz="1700" b="0" i="0">
+                <a:solidFill>
+                  <a:srgbClr val="26231F"/>
+                </a:solidFill>
+              </a:rPr>
+              <a:t>바닷가 등대까지 걸어간 휴가</a:t>
+            </a:r>
+          </a:p>
+        </p:txBody>
+      </p:sp>
+      <p:sp>
+        <p:nvSpPr>
+          <p:cNvPr id="7" name="안내 문구"/>
           <p:cNvSpPr txBox="1"/>
           <p:nvPr/>
         </p:nvSpPr>
         <p:spPr>
           <a:xfrm>
-            <a:off x="853418" y="4617720"/>
-            <a:ext cx="6095847" cy="914400"/>
+            <a:off x="6827349" y="4754880"/>
+            <a:ext cx="4632844" cy="914400"/>
           </a:xfrm>
           <a:prstGeom prst="rect">
             <a:avLst/>
@@ -3423,10 +3517,10 @@
             <a:r>
               <a:rPr sz="1400" b="0" i="0">
                 <a:solidFill>
-                  <a:srgbClr val="666666"/>
-                </a:solidFill>
-              </a:rPr>
-              <a:t>3대 가족 · 2027. 00. 00</a:t>
+                  <a:srgbClr val="26231F"/>
+                </a:solidFill>
+              </a:rPr>
+              <a:t>3대 가족 · 날짜 입력</a:t>
             </a:r>
           </a:p>
         </p:txBody>
@@ -3459,20 +3553,20 @@
       <p:grpSpPr/>
       <p:sp>
         <p:nvSpPr>
-          <p:cNvPr id="3" name="장식"/>
+          <p:cNvPr id="3" name="포인트"/>
           <p:cNvSpPr/>
           <p:nvPr/>
         </p:nvSpPr>
         <p:spPr>
           <a:xfrm>
-            <a:off x="0" y="384048"/>
-            <a:ext cx="9509522" cy="896112"/>
-          </a:xfrm>
-          <a:prstGeom prst="homePlate">
+            <a:off x="5958687" y="246888"/>
+            <a:ext cx="274320" cy="274320"/>
+          </a:xfrm>
+          <a:prstGeom prst="sun">
             <a:avLst/>
           </a:prstGeom>
           <a:solidFill>
-            <a:srgbClr val="2695C5"/>
+            <a:srgbClr val="7BC9EA"/>
           </a:solidFill>
           <a:ln>
             <a:noFill/>
@@ -3483,6 +3577,73 @@
           <a:lstStyle/>
           <a:p>
             <a:pPr algn="ctr"/>
+          </a:p>
+        </p:txBody>
+      </p:sp>
+      <p:sp>
+        <p:nvSpPr>
+          <p:cNvPr id="4" name="장식"/>
+          <p:cNvSpPr/>
+          <p:nvPr/>
+        </p:nvSpPr>
+        <p:spPr>
+          <a:xfrm>
+            <a:off x="5684367" y="1572768"/>
+            <a:ext cx="822960" cy="22860"/>
+          </a:xfrm>
+          <a:prstGeom prst="rect">
+            <a:avLst/>
+          </a:prstGeom>
+          <a:solidFill>
+            <a:srgbClr val="7BC9EA"/>
+          </a:solidFill>
+          <a:ln>
+            <a:noFill/>
+          </a:ln>
+        </p:spPr>
+        <p:txBody>
+          <a:bodyPr rtlCol="0" anchor="ctr"/>
+          <a:lstStyle/>
+          <a:p>
+            <a:pPr algn="ctr"/>
+          </a:p>
+        </p:txBody>
+      </p:sp>
+      <p:sp>
+        <p:nvSpPr>
+          <p:cNvPr id="5" name="상단 라벨"/>
+          <p:cNvSpPr txBox="1"/>
+          <p:nvPr/>
+        </p:nvSpPr>
+        <p:spPr>
+          <a:xfrm>
+            <a:off x="640080" y="182880"/>
+            <a:ext cx="3657600" cy="274320"/>
+          </a:xfrm>
+          <a:prstGeom prst="rect">
+            <a:avLst/>
+          </a:prstGeom>
+          <a:noFill/>
+        </p:spPr>
+        <p:txBody>
+          <a:bodyPr wrap="square" lIns="54864" rIns="54864" tIns="27432" bIns="27432" anchor="ctr">
+            <a:noAutofit/>
+          </a:bodyPr>
+          <a:lstStyle/>
+          <a:p>
+            <a:pPr algn="l">
+              <a:lnSpc>
+                <a:spcPct val="115000"/>
+              </a:lnSpc>
+            </a:pPr>
+            <a:r>
+              <a:rPr sz="800" b="1" i="0" spc="250">
+                <a:solidFill>
+                  <a:srgbClr val="8E8780"/>
+                </a:solidFill>
+              </a:rPr>
+              <a:t>FAMILY ALBUM</a:t>
+            </a:r>
           </a:p>
         </p:txBody>
       </p:sp>
@@ -3498,8 +3659,8 @@
         </p:nvSpPr>
         <p:spPr>
           <a:xfrm>
-            <a:off x="640080" y="411480"/>
-            <a:ext cx="8412242" cy="822960"/>
+            <a:off x="1371600" y="640080"/>
+            <a:ext cx="9448495" cy="868680"/>
           </a:xfrm>
         </p:spPr>
         <p:txBody>
@@ -3508,7 +3669,7 @@
           </a:bodyPr>
           <a:lstStyle/>
           <a:p>
-            <a:pPr algn="l">
+            <a:pPr algn="ctr">
               <a:lnSpc>
                 <a:spcPct val="105000"/>
               </a:lnSpc>
@@ -3516,7 +3677,7 @@
             <a:r>
               <a:rPr sz="3000" b="1" i="0">
                 <a:solidFill>
-                  <a:srgbClr val="FFFFFF"/>
+                  <a:srgbClr val="26231F"/>
                 </a:solidFill>
               </a:rPr>
               <a:t>가족 구성원</a:t>
@@ -3526,13 +3687,13 @@
       </p:sp>
       <p:sp>
         <p:nvSpPr>
-          <p:cNvPr id="4" name="사진 자리"/>
+          <p:cNvPr id="6" name="사진 자리"/>
           <p:cNvSpPr/>
           <p:nvPr/>
         </p:nvSpPr>
         <p:spPr>
           <a:xfrm>
-            <a:off x="777240" y="1645920"/>
+            <a:off x="777240" y="1783080"/>
             <a:ext cx="1353769" cy="1353769"/>
           </a:xfrm>
           <a:prstGeom prst="ellipse">
@@ -3542,9 +3703,7 @@
             <a:srgbClr val="D1EEFA"/>
           </a:solidFill>
           <a:ln w="19050">
-            <a:solidFill>
-              <a:srgbClr val="2695C5"/>
-            </a:solidFill>
+            <a:noFill/>
             <a:prstDash val="dash"/>
           </a:ln>
         </p:spPr>
@@ -3562,7 +3721,7 @@
             <a:r>
               <a:rPr sz="1200" b="0" i="0">
                 <a:solidFill>
-                  <a:srgbClr val="11485F"/>
+                  <a:srgbClr val="8E8780"/>
                 </a:solidFill>
               </a:rPr>
               <a:t>사진</a:t>
@@ -3572,13 +3731,13 @@
       </p:sp>
       <p:sp>
         <p:nvSpPr>
-          <p:cNvPr id="5" name="TextBox 4"/>
+          <p:cNvPr id="7" name="TextBox 6"/>
           <p:cNvSpPr txBox="1"/>
           <p:nvPr/>
         </p:nvSpPr>
         <p:spPr>
           <a:xfrm>
-            <a:off x="640080" y="3091129"/>
+            <a:off x="640080" y="3228289"/>
             <a:ext cx="1628089" cy="411480"/>
           </a:xfrm>
           <a:prstGeom prst="rect">
@@ -3600,7 +3759,7 @@
             <a:r>
               <a:rPr sz="1600" b="1" i="0">
                 <a:solidFill>
-                  <a:srgbClr val="11485F"/>
+                  <a:srgbClr val="273F49"/>
                 </a:solidFill>
               </a:rPr>
               <a:t>할아버지</a:t>
@@ -3610,14 +3769,14 @@
       </p:sp>
       <p:sp>
         <p:nvSpPr>
-          <p:cNvPr id="6" name="TextBox 5"/>
+          <p:cNvPr id="8" name="TextBox 7"/>
           <p:cNvSpPr txBox="1"/>
           <p:nvPr/>
         </p:nvSpPr>
         <p:spPr>
           <a:xfrm>
-            <a:off x="731519" y="3548329"/>
-            <a:ext cx="1445209" cy="2852470"/>
+            <a:off x="731519" y="3685489"/>
+            <a:ext cx="1445209" cy="2669590"/>
           </a:xfrm>
           <a:prstGeom prst="rect">
             <a:avLst/>
@@ -3678,13 +3837,13 @@
       </p:sp>
       <p:sp>
         <p:nvSpPr>
-          <p:cNvPr id="7" name="사진 자리"/>
+          <p:cNvPr id="9" name="사진 자리"/>
           <p:cNvSpPr/>
           <p:nvPr/>
         </p:nvSpPr>
         <p:spPr>
           <a:xfrm>
-            <a:off x="2633929" y="1645920"/>
+            <a:off x="2633929" y="1783080"/>
             <a:ext cx="1353769" cy="1353769"/>
           </a:xfrm>
           <a:prstGeom prst="ellipse">
@@ -3694,9 +3853,7 @@
             <a:srgbClr val="D1EEFA"/>
           </a:solidFill>
           <a:ln w="19050">
-            <a:solidFill>
-              <a:srgbClr val="2695C5"/>
-            </a:solidFill>
+            <a:noFill/>
             <a:prstDash val="dash"/>
           </a:ln>
         </p:spPr>
@@ -3714,7 +3871,7 @@
             <a:r>
               <a:rPr sz="1200" b="0" i="0">
                 <a:solidFill>
-                  <a:srgbClr val="11485F"/>
+                  <a:srgbClr val="8E8780"/>
                 </a:solidFill>
               </a:rPr>
               <a:t>사진</a:t>
@@ -3724,13 +3881,13 @@
       </p:sp>
       <p:sp>
         <p:nvSpPr>
-          <p:cNvPr id="8" name="TextBox 7"/>
+          <p:cNvPr id="10" name="TextBox 9"/>
           <p:cNvSpPr txBox="1"/>
           <p:nvPr/>
         </p:nvSpPr>
         <p:spPr>
           <a:xfrm>
-            <a:off x="2496769" y="3091129"/>
+            <a:off x="2496769" y="3228289"/>
             <a:ext cx="1628089" cy="411480"/>
           </a:xfrm>
           <a:prstGeom prst="rect">
@@ -3752,7 +3909,7 @@
             <a:r>
               <a:rPr sz="1600" b="1" i="0">
                 <a:solidFill>
-                  <a:srgbClr val="11485F"/>
+                  <a:srgbClr val="273F49"/>
                 </a:solidFill>
               </a:rPr>
               <a:t>할머니</a:t>
@@ -3762,14 +3919,14 @@
       </p:sp>
       <p:sp>
         <p:nvSpPr>
-          <p:cNvPr id="9" name="TextBox 8"/>
+          <p:cNvPr id="11" name="TextBox 10"/>
           <p:cNvSpPr txBox="1"/>
           <p:nvPr/>
         </p:nvSpPr>
         <p:spPr>
           <a:xfrm>
-            <a:off x="2588209" y="3548329"/>
-            <a:ext cx="1445209" cy="2852470"/>
+            <a:off x="2588209" y="3685489"/>
+            <a:ext cx="1445209" cy="2669590"/>
           </a:xfrm>
           <a:prstGeom prst="rect">
             <a:avLst/>
@@ -3830,13 +3987,13 @@
       </p:sp>
       <p:sp>
         <p:nvSpPr>
-          <p:cNvPr id="10" name="사진 자리"/>
+          <p:cNvPr id="12" name="사진 자리"/>
           <p:cNvSpPr/>
           <p:nvPr/>
         </p:nvSpPr>
         <p:spPr>
           <a:xfrm>
-            <a:off x="4490618" y="1645920"/>
+            <a:off x="4490618" y="1783080"/>
             <a:ext cx="1353769" cy="1353769"/>
           </a:xfrm>
           <a:prstGeom prst="ellipse">
@@ -3846,9 +4003,7 @@
             <a:srgbClr val="D1EEFA"/>
           </a:solidFill>
           <a:ln w="19050">
-            <a:solidFill>
-              <a:srgbClr val="2695C5"/>
-            </a:solidFill>
+            <a:noFill/>
             <a:prstDash val="dash"/>
           </a:ln>
         </p:spPr>
@@ -3866,7 +4021,7 @@
             <a:r>
               <a:rPr sz="1200" b="0" i="0">
                 <a:solidFill>
-                  <a:srgbClr val="11485F"/>
+                  <a:srgbClr val="8E8780"/>
                 </a:solidFill>
               </a:rPr>
               <a:t>사진</a:t>
@@ -3876,13 +4031,13 @@
       </p:sp>
       <p:sp>
         <p:nvSpPr>
-          <p:cNvPr id="11" name="TextBox 10"/>
+          <p:cNvPr id="13" name="TextBox 12"/>
           <p:cNvSpPr txBox="1"/>
           <p:nvPr/>
         </p:nvSpPr>
         <p:spPr>
           <a:xfrm>
-            <a:off x="4353458" y="3091129"/>
+            <a:off x="4353458" y="3228289"/>
             <a:ext cx="1628089" cy="411480"/>
           </a:xfrm>
           <a:prstGeom prst="rect">
@@ -3904,7 +4059,7 @@
             <a:r>
               <a:rPr sz="1600" b="1" i="0">
                 <a:solidFill>
-                  <a:srgbClr val="11485F"/>
+                  <a:srgbClr val="273F49"/>
                 </a:solidFill>
               </a:rPr>
               <a:t>아빠</a:t>
@@ -3914,14 +4069,14 @@
       </p:sp>
       <p:sp>
         <p:nvSpPr>
-          <p:cNvPr id="12" name="TextBox 11"/>
+          <p:cNvPr id="14" name="TextBox 13"/>
           <p:cNvSpPr txBox="1"/>
           <p:nvPr/>
         </p:nvSpPr>
         <p:spPr>
           <a:xfrm>
-            <a:off x="4444898" y="3548329"/>
-            <a:ext cx="1445209" cy="2852470"/>
+            <a:off x="4444898" y="3685489"/>
+            <a:ext cx="1445209" cy="2669590"/>
           </a:xfrm>
           <a:prstGeom prst="rect">
             <a:avLst/>
@@ -3982,13 +4137,13 @@
       </p:sp>
       <p:sp>
         <p:nvSpPr>
-          <p:cNvPr id="13" name="사진 자리"/>
+          <p:cNvPr id="15" name="사진 자리"/>
           <p:cNvSpPr/>
           <p:nvPr/>
         </p:nvSpPr>
         <p:spPr>
           <a:xfrm>
-            <a:off x="6347307" y="1645920"/>
+            <a:off x="6347307" y="1783080"/>
             <a:ext cx="1353769" cy="1353769"/>
           </a:xfrm>
           <a:prstGeom prst="ellipse">
@@ -3998,9 +4153,7 @@
             <a:srgbClr val="D1EEFA"/>
           </a:solidFill>
           <a:ln w="19050">
-            <a:solidFill>
-              <a:srgbClr val="2695C5"/>
-            </a:solidFill>
+            <a:noFill/>
             <a:prstDash val="dash"/>
           </a:ln>
         </p:spPr>
@@ -4018,7 +4171,7 @@
             <a:r>
               <a:rPr sz="1200" b="0" i="0">
                 <a:solidFill>
-                  <a:srgbClr val="11485F"/>
+                  <a:srgbClr val="8E8780"/>
                 </a:solidFill>
               </a:rPr>
               <a:t>사진</a:t>
@@ -4028,13 +4181,13 @@
       </p:sp>
       <p:sp>
         <p:nvSpPr>
-          <p:cNvPr id="14" name="TextBox 13"/>
+          <p:cNvPr id="16" name="TextBox 15"/>
           <p:cNvSpPr txBox="1"/>
           <p:nvPr/>
         </p:nvSpPr>
         <p:spPr>
           <a:xfrm>
-            <a:off x="6210147" y="3091129"/>
+            <a:off x="6210147" y="3228289"/>
             <a:ext cx="1628089" cy="411480"/>
           </a:xfrm>
           <a:prstGeom prst="rect">
@@ -4056,7 +4209,7 @@
             <a:r>
               <a:rPr sz="1600" b="1" i="0">
                 <a:solidFill>
-                  <a:srgbClr val="11485F"/>
+                  <a:srgbClr val="273F49"/>
                 </a:solidFill>
               </a:rPr>
               <a:t>엄마</a:t>
@@ -4066,14 +4219,14 @@
       </p:sp>
       <p:sp>
         <p:nvSpPr>
-          <p:cNvPr id="15" name="TextBox 14"/>
+          <p:cNvPr id="17" name="TextBox 16"/>
           <p:cNvSpPr txBox="1"/>
           <p:nvPr/>
         </p:nvSpPr>
         <p:spPr>
           <a:xfrm>
-            <a:off x="6301587" y="3548329"/>
-            <a:ext cx="1445209" cy="2852470"/>
+            <a:off x="6301587" y="3685489"/>
+            <a:ext cx="1445209" cy="2669590"/>
           </a:xfrm>
           <a:prstGeom prst="rect">
             <a:avLst/>
@@ -4134,13 +4287,13 @@
       </p:sp>
       <p:sp>
         <p:nvSpPr>
-          <p:cNvPr id="16" name="사진 자리"/>
+          <p:cNvPr id="18" name="사진 자리"/>
           <p:cNvSpPr/>
           <p:nvPr/>
         </p:nvSpPr>
         <p:spPr>
           <a:xfrm>
-            <a:off x="8203996" y="1645920"/>
+            <a:off x="8203996" y="1783080"/>
             <a:ext cx="1353769" cy="1353769"/>
           </a:xfrm>
           <a:prstGeom prst="ellipse">
@@ -4150,9 +4303,7 @@
             <a:srgbClr val="D1EEFA"/>
           </a:solidFill>
           <a:ln w="19050">
-            <a:solidFill>
-              <a:srgbClr val="2695C5"/>
-            </a:solidFill>
+            <a:noFill/>
             <a:prstDash val="dash"/>
           </a:ln>
         </p:spPr>
@@ -4170,7 +4321,7 @@
             <a:r>
               <a:rPr sz="1200" b="0" i="0">
                 <a:solidFill>
-                  <a:srgbClr val="11485F"/>
+                  <a:srgbClr val="8E8780"/>
                 </a:solidFill>
               </a:rPr>
               <a:t>사진</a:t>
@@ -4180,13 +4331,13 @@
       </p:sp>
       <p:sp>
         <p:nvSpPr>
-          <p:cNvPr id="17" name="TextBox 16"/>
+          <p:cNvPr id="19" name="TextBox 18"/>
           <p:cNvSpPr txBox="1"/>
           <p:nvPr/>
         </p:nvSpPr>
         <p:spPr>
           <a:xfrm>
-            <a:off x="8066836" y="3091129"/>
+            <a:off x="8066836" y="3228289"/>
             <a:ext cx="1628089" cy="411480"/>
           </a:xfrm>
           <a:prstGeom prst="rect">
@@ -4208,7 +4359,7 @@
             <a:r>
               <a:rPr sz="1600" b="1" i="0">
                 <a:solidFill>
-                  <a:srgbClr val="11485F"/>
+                  <a:srgbClr val="273F49"/>
                 </a:solidFill>
               </a:rPr>
               <a:t>큰아이</a:t>
@@ -4218,14 +4369,14 @@
       </p:sp>
       <p:sp>
         <p:nvSpPr>
-          <p:cNvPr id="18" name="TextBox 17"/>
+          <p:cNvPr id="20" name="TextBox 19"/>
           <p:cNvSpPr txBox="1"/>
           <p:nvPr/>
         </p:nvSpPr>
         <p:spPr>
           <a:xfrm>
-            <a:off x="8158276" y="3548329"/>
-            <a:ext cx="1445209" cy="2852470"/>
+            <a:off x="8158276" y="3685489"/>
+            <a:ext cx="1445209" cy="2669590"/>
           </a:xfrm>
           <a:prstGeom prst="rect">
             <a:avLst/>
@@ -4286,13 +4437,13 @@
       </p:sp>
       <p:sp>
         <p:nvSpPr>
-          <p:cNvPr id="19" name="사진 자리"/>
+          <p:cNvPr id="21" name="사진 자리"/>
           <p:cNvSpPr/>
           <p:nvPr/>
         </p:nvSpPr>
         <p:spPr>
           <a:xfrm>
-            <a:off x="10060686" y="1645920"/>
+            <a:off x="10060686" y="1783080"/>
             <a:ext cx="1353769" cy="1353769"/>
           </a:xfrm>
           <a:prstGeom prst="ellipse">
@@ -4302,9 +4453,7 @@
             <a:srgbClr val="D1EEFA"/>
           </a:solidFill>
           <a:ln w="19050">
-            <a:solidFill>
-              <a:srgbClr val="2695C5"/>
-            </a:solidFill>
+            <a:noFill/>
             <a:prstDash val="dash"/>
           </a:ln>
         </p:spPr>
@@ -4322,7 +4471,7 @@
             <a:r>
               <a:rPr sz="1200" b="0" i="0">
                 <a:solidFill>
-                  <a:srgbClr val="11485F"/>
+                  <a:srgbClr val="8E8780"/>
                 </a:solidFill>
               </a:rPr>
               <a:t>사진</a:t>
@@ -4332,13 +4481,13 @@
       </p:sp>
       <p:sp>
         <p:nvSpPr>
-          <p:cNvPr id="20" name="TextBox 19"/>
+          <p:cNvPr id="22" name="TextBox 21"/>
           <p:cNvSpPr txBox="1"/>
           <p:nvPr/>
         </p:nvSpPr>
         <p:spPr>
           <a:xfrm>
-            <a:off x="9923526" y="3091129"/>
+            <a:off x="9923526" y="3228289"/>
             <a:ext cx="1628089" cy="411480"/>
           </a:xfrm>
           <a:prstGeom prst="rect">
@@ -4360,7 +4509,7 @@
             <a:r>
               <a:rPr sz="1600" b="1" i="0">
                 <a:solidFill>
-                  <a:srgbClr val="11485F"/>
+                  <a:srgbClr val="273F49"/>
                 </a:solidFill>
               </a:rPr>
               <a:t>작은아이</a:t>
@@ -4370,14 +4519,14 @@
       </p:sp>
       <p:sp>
         <p:nvSpPr>
-          <p:cNvPr id="21" name="TextBox 20"/>
+          <p:cNvPr id="23" name="TextBox 22"/>
           <p:cNvSpPr txBox="1"/>
           <p:nvPr/>
         </p:nvSpPr>
         <p:spPr>
           <a:xfrm>
-            <a:off x="10014965" y="3548329"/>
-            <a:ext cx="1445209" cy="2852470"/>
+            <a:off x="10014965" y="3685489"/>
+            <a:ext cx="1445209" cy="2669590"/>
           </a:xfrm>
           <a:prstGeom prst="rect">
             <a:avLst/>
@@ -4464,20 +4613,20 @@
       <p:grpSpPr/>
       <p:sp>
         <p:nvSpPr>
-          <p:cNvPr id="3" name="장식"/>
+          <p:cNvPr id="3" name="포인트"/>
           <p:cNvSpPr/>
           <p:nvPr/>
         </p:nvSpPr>
         <p:spPr>
           <a:xfrm>
-            <a:off x="0" y="384048"/>
-            <a:ext cx="9509522" cy="896112"/>
-          </a:xfrm>
-          <a:prstGeom prst="homePlate">
+            <a:off x="5958687" y="246888"/>
+            <a:ext cx="274320" cy="274320"/>
+          </a:xfrm>
+          <a:prstGeom prst="sun">
             <a:avLst/>
           </a:prstGeom>
           <a:solidFill>
-            <a:srgbClr val="2695C5"/>
+            <a:srgbClr val="7BC9EA"/>
           </a:solidFill>
           <a:ln>
             <a:noFill/>
@@ -4488,6 +4637,73 @@
           <a:lstStyle/>
           <a:p>
             <a:pPr algn="ctr"/>
+          </a:p>
+        </p:txBody>
+      </p:sp>
+      <p:sp>
+        <p:nvSpPr>
+          <p:cNvPr id="4" name="장식"/>
+          <p:cNvSpPr/>
+          <p:nvPr/>
+        </p:nvSpPr>
+        <p:spPr>
+          <a:xfrm>
+            <a:off x="5684367" y="1572768"/>
+            <a:ext cx="822960" cy="22860"/>
+          </a:xfrm>
+          <a:prstGeom prst="rect">
+            <a:avLst/>
+          </a:prstGeom>
+          <a:solidFill>
+            <a:srgbClr val="7BC9EA"/>
+          </a:solidFill>
+          <a:ln>
+            <a:noFill/>
+          </a:ln>
+        </p:spPr>
+        <p:txBody>
+          <a:bodyPr rtlCol="0" anchor="ctr"/>
+          <a:lstStyle/>
+          <a:p>
+            <a:pPr algn="ctr"/>
+          </a:p>
+        </p:txBody>
+      </p:sp>
+      <p:sp>
+        <p:nvSpPr>
+          <p:cNvPr id="5" name="상단 라벨"/>
+          <p:cNvSpPr txBox="1"/>
+          <p:nvPr/>
+        </p:nvSpPr>
+        <p:spPr>
+          <a:xfrm>
+            <a:off x="640080" y="182880"/>
+            <a:ext cx="3657600" cy="274320"/>
+          </a:xfrm>
+          <a:prstGeom prst="rect">
+            <a:avLst/>
+          </a:prstGeom>
+          <a:noFill/>
+        </p:spPr>
+        <p:txBody>
+          <a:bodyPr wrap="square" lIns="54864" rIns="54864" tIns="27432" bIns="27432" anchor="ctr">
+            <a:noAutofit/>
+          </a:bodyPr>
+          <a:lstStyle/>
+          <a:p>
+            <a:pPr algn="l">
+              <a:lnSpc>
+                <a:spcPct val="115000"/>
+              </a:lnSpc>
+            </a:pPr>
+            <a:r>
+              <a:rPr sz="800" b="1" i="0" spc="250">
+                <a:solidFill>
+                  <a:srgbClr val="8E8780"/>
+                </a:solidFill>
+              </a:rPr>
+              <a:t>FAMILY ALBUM</a:t>
+            </a:r>
           </a:p>
         </p:txBody>
       </p:sp>
@@ -4503,8 +4719,8 @@
         </p:nvSpPr>
         <p:spPr>
           <a:xfrm>
-            <a:off x="640080" y="411480"/>
-            <a:ext cx="8412242" cy="822960"/>
+            <a:off x="1371600" y="640080"/>
+            <a:ext cx="9448495" cy="868680"/>
           </a:xfrm>
         </p:spPr>
         <p:txBody>
@@ -4513,7 +4729,7 @@
           </a:bodyPr>
           <a:lstStyle/>
           <a:p>
-            <a:pPr algn="l">
+            <a:pPr algn="ctr">
               <a:lnSpc>
                 <a:spcPct val="105000"/>
               </a:lnSpc>
@@ -4521,7 +4737,7 @@
             <a:r>
               <a:rPr sz="3000" b="1" i="0">
                 <a:solidFill>
-                  <a:srgbClr val="FFFFFF"/>
+                  <a:srgbClr val="26231F"/>
                 </a:solidFill>
               </a:rPr>
               <a:t>우리 가족 이야기</a:t>
@@ -4531,13 +4747,13 @@
       </p:sp>
       <p:sp>
         <p:nvSpPr>
-          <p:cNvPr id="4" name="타임라인 선"/>
+          <p:cNvPr id="6" name="타임라인 선"/>
           <p:cNvSpPr/>
           <p:nvPr/>
         </p:nvSpPr>
         <p:spPr>
           <a:xfrm>
-            <a:off x="640080" y="3383280"/>
+            <a:off x="640080" y="3520440"/>
             <a:ext cx="10911535" cy="54864"/>
           </a:xfrm>
           <a:prstGeom prst="rect">
@@ -4560,20 +4776,20 @@
       </p:sp>
       <p:sp>
         <p:nvSpPr>
-          <p:cNvPr id="5" name="때 1"/>
+          <p:cNvPr id="7" name="때 1"/>
           <p:cNvSpPr/>
           <p:nvPr/>
         </p:nvSpPr>
         <p:spPr>
           <a:xfrm>
-            <a:off x="1802853" y="3200400"/>
+            <a:off x="1802853" y="3337560"/>
             <a:ext cx="402336" cy="402336"/>
           </a:xfrm>
           <a:prstGeom prst="ellipse">
             <a:avLst/>
           </a:prstGeom>
           <a:solidFill>
-            <a:srgbClr val="2695C5"/>
+            <a:srgbClr val="7BC9EA"/>
           </a:solidFill>
           <a:ln w="38100">
             <a:solidFill>
@@ -4591,13 +4807,13 @@
       </p:sp>
       <p:sp>
         <p:nvSpPr>
-          <p:cNvPr id="6" name="TextBox 5"/>
+          <p:cNvPr id="8" name="TextBox 7"/>
           <p:cNvSpPr txBox="1"/>
           <p:nvPr/>
         </p:nvSpPr>
         <p:spPr>
           <a:xfrm>
-            <a:off x="685800" y="2560320"/>
+            <a:off x="685800" y="2697480"/>
             <a:ext cx="2636443" cy="457200"/>
           </a:xfrm>
           <a:prstGeom prst="rect">
@@ -4619,7 +4835,7 @@
             <a:r>
               <a:rPr sz="1600" b="1" i="0">
                 <a:solidFill>
-                  <a:srgbClr val="2695C5"/>
+                  <a:srgbClr val="7BC9EA"/>
                 </a:solidFill>
               </a:rPr>
               <a:t>할아버지 할머니의 이야기</a:t>
@@ -4629,13 +4845,13 @@
       </p:sp>
       <p:sp>
         <p:nvSpPr>
-          <p:cNvPr id="7" name="TextBox 6"/>
+          <p:cNvPr id="9" name="TextBox 8"/>
           <p:cNvSpPr txBox="1"/>
           <p:nvPr/>
         </p:nvSpPr>
         <p:spPr>
           <a:xfrm>
-            <a:off x="731519" y="3749039"/>
+            <a:off x="731519" y="3886200"/>
             <a:ext cx="2545003" cy="457200"/>
           </a:xfrm>
           <a:prstGeom prst="rect">
@@ -4657,7 +4873,7 @@
             <a:r>
               <a:rPr sz="1800" b="1" i="0">
                 <a:solidFill>
-                  <a:srgbClr val="11485F"/>
+                  <a:srgbClr val="273F49"/>
                 </a:solidFill>
               </a:rPr>
               <a:t>뿌리</a:t>
@@ -4667,13 +4883,13 @@
       </p:sp>
       <p:sp>
         <p:nvSpPr>
-          <p:cNvPr id="8" name="TextBox 7"/>
+          <p:cNvPr id="10" name="TextBox 9"/>
           <p:cNvSpPr txBox="1"/>
           <p:nvPr/>
         </p:nvSpPr>
         <p:spPr>
           <a:xfrm>
-            <a:off x="731519" y="4251960"/>
+            <a:off x="731519" y="4389120"/>
             <a:ext cx="2545003" cy="1645920"/>
           </a:xfrm>
           <a:prstGeom prst="rect">
@@ -4695,7 +4911,7 @@
             <a:r>
               <a:rPr sz="1500" b="0" i="0">
                 <a:solidFill>
-                  <a:srgbClr val="2B2B2B"/>
+                  <a:srgbClr val="26231F"/>
                 </a:solidFill>
               </a:rPr>
               <a:t>가족의 시작을 적어요</a:t>
@@ -4705,20 +4921,20 @@
       </p:sp>
       <p:sp>
         <p:nvSpPr>
-          <p:cNvPr id="9" name="때 2"/>
+          <p:cNvPr id="11" name="때 2"/>
           <p:cNvSpPr/>
           <p:nvPr/>
         </p:nvSpPr>
         <p:spPr>
           <a:xfrm>
-            <a:off x="4530737" y="3200400"/>
+            <a:off x="4530737" y="3337560"/>
             <a:ext cx="402336" cy="402336"/>
           </a:xfrm>
           <a:prstGeom prst="ellipse">
             <a:avLst/>
           </a:prstGeom>
           <a:solidFill>
-            <a:srgbClr val="2695C5"/>
+            <a:srgbClr val="7BC9EA"/>
           </a:solidFill>
           <a:ln w="38100">
             <a:solidFill>
@@ -4736,13 +4952,13 @@
       </p:sp>
       <p:sp>
         <p:nvSpPr>
-          <p:cNvPr id="10" name="TextBox 9"/>
+          <p:cNvPr id="12" name="TextBox 11"/>
           <p:cNvSpPr txBox="1"/>
           <p:nvPr/>
         </p:nvSpPr>
         <p:spPr>
           <a:xfrm>
-            <a:off x="3413683" y="2560320"/>
+            <a:off x="3413683" y="2697480"/>
             <a:ext cx="2636443" cy="457200"/>
           </a:xfrm>
           <a:prstGeom prst="rect">
@@ -4764,7 +4980,7 @@
             <a:r>
               <a:rPr sz="1600" b="1" i="0">
                 <a:solidFill>
-                  <a:srgbClr val="2695C5"/>
+                  <a:srgbClr val="7BC9EA"/>
                 </a:solidFill>
               </a:rPr>
               <a:t>부모가 된 날</a:t>
@@ -4774,13 +4990,13 @@
       </p:sp>
       <p:sp>
         <p:nvSpPr>
-          <p:cNvPr id="11" name="TextBox 10"/>
+          <p:cNvPr id="13" name="TextBox 12"/>
           <p:cNvSpPr txBox="1"/>
           <p:nvPr/>
         </p:nvSpPr>
         <p:spPr>
           <a:xfrm>
-            <a:off x="3459403" y="3749039"/>
+            <a:off x="3459403" y="3886200"/>
             <a:ext cx="2545003" cy="457200"/>
           </a:xfrm>
           <a:prstGeom prst="rect">
@@ -4802,7 +5018,7 @@
             <a:r>
               <a:rPr sz="1800" b="1" i="0">
                 <a:solidFill>
-                  <a:srgbClr val="11485F"/>
+                  <a:srgbClr val="273F49"/>
                 </a:solidFill>
               </a:rPr>
               <a:t>새로운 가지</a:t>
@@ -4812,13 +5028,13 @@
       </p:sp>
       <p:sp>
         <p:nvSpPr>
-          <p:cNvPr id="12" name="TextBox 11"/>
+          <p:cNvPr id="14" name="TextBox 13"/>
           <p:cNvSpPr txBox="1"/>
           <p:nvPr/>
         </p:nvSpPr>
         <p:spPr>
           <a:xfrm>
-            <a:off x="3459403" y="4251960"/>
+            <a:off x="3459403" y="4389120"/>
             <a:ext cx="2545003" cy="1645920"/>
           </a:xfrm>
           <a:prstGeom prst="rect">
@@ -4840,7 +5056,7 @@
             <a:r>
               <a:rPr sz="1500" b="0" i="0">
                 <a:solidFill>
-                  <a:srgbClr val="2B2B2B"/>
+                  <a:srgbClr val="26231F"/>
                 </a:solidFill>
               </a:rPr>
               <a:t>그날의 기억을 적어요</a:t>
@@ -4850,20 +5066,20 @@
       </p:sp>
       <p:sp>
         <p:nvSpPr>
-          <p:cNvPr id="13" name="때 3"/>
+          <p:cNvPr id="15" name="때 3"/>
           <p:cNvSpPr/>
           <p:nvPr/>
         </p:nvSpPr>
         <p:spPr>
           <a:xfrm>
-            <a:off x="7258621" y="3200400"/>
+            <a:off x="7258621" y="3337560"/>
             <a:ext cx="402336" cy="402336"/>
           </a:xfrm>
           <a:prstGeom prst="ellipse">
             <a:avLst/>
           </a:prstGeom>
           <a:solidFill>
-            <a:srgbClr val="2695C5"/>
+            <a:srgbClr val="7BC9EA"/>
           </a:solidFill>
           <a:ln w="38100">
             <a:solidFill>
@@ -4881,13 +5097,13 @@
       </p:sp>
       <p:sp>
         <p:nvSpPr>
-          <p:cNvPr id="14" name="TextBox 13"/>
+          <p:cNvPr id="16" name="TextBox 15"/>
           <p:cNvSpPr txBox="1"/>
           <p:nvPr/>
         </p:nvSpPr>
         <p:spPr>
           <a:xfrm>
-            <a:off x="6141567" y="2560320"/>
+            <a:off x="6141567" y="2697480"/>
             <a:ext cx="2636443" cy="457200"/>
           </a:xfrm>
           <a:prstGeom prst="rect">
@@ -4909,7 +5125,7 @@
             <a:r>
               <a:rPr sz="1600" b="1" i="0">
                 <a:solidFill>
-                  <a:srgbClr val="2695C5"/>
+                  <a:srgbClr val="7BC9EA"/>
                 </a:solidFill>
               </a:rPr>
               <a:t>온 가족 모임</a:t>
@@ -4919,13 +5135,13 @@
       </p:sp>
       <p:sp>
         <p:nvSpPr>
-          <p:cNvPr id="15" name="TextBox 14"/>
+          <p:cNvPr id="17" name="TextBox 16"/>
           <p:cNvSpPr txBox="1"/>
           <p:nvPr/>
         </p:nvSpPr>
         <p:spPr>
           <a:xfrm>
-            <a:off x="6187287" y="3749039"/>
+            <a:off x="6187287" y="3886200"/>
             <a:ext cx="2545003" cy="457200"/>
           </a:xfrm>
           <a:prstGeom prst="rect">
@@ -4947,7 +5163,7 @@
             <a:r>
               <a:rPr sz="1800" b="1" i="0">
                 <a:solidFill>
-                  <a:srgbClr val="11485F"/>
+                  <a:srgbClr val="273F49"/>
                 </a:solidFill>
               </a:rPr>
               <a:t>한자리에 모인 날</a:t>
@@ -4957,13 +5173,13 @@
       </p:sp>
       <p:sp>
         <p:nvSpPr>
-          <p:cNvPr id="16" name="TextBox 15"/>
+          <p:cNvPr id="18" name="TextBox 17"/>
           <p:cNvSpPr txBox="1"/>
           <p:nvPr/>
         </p:nvSpPr>
         <p:spPr>
           <a:xfrm>
-            <a:off x="6187287" y="4251960"/>
+            <a:off x="6187287" y="4389120"/>
             <a:ext cx="2545003" cy="1645920"/>
           </a:xfrm>
           <a:prstGeom prst="rect">
@@ -4985,7 +5201,7 @@
             <a:r>
               <a:rPr sz="1500" b="0" i="0">
                 <a:solidFill>
-                  <a:srgbClr val="2B2B2B"/>
+                  <a:srgbClr val="26231F"/>
                 </a:solidFill>
               </a:rPr>
               <a:t>가장 즐거웠던 명절</a:t>
@@ -4995,20 +5211,20 @@
       </p:sp>
       <p:sp>
         <p:nvSpPr>
-          <p:cNvPr id="17" name="때 4"/>
+          <p:cNvPr id="19" name="때 4"/>
           <p:cNvSpPr/>
           <p:nvPr/>
         </p:nvSpPr>
         <p:spPr>
           <a:xfrm>
-            <a:off x="9986505" y="3200400"/>
+            <a:off x="9986505" y="3337560"/>
             <a:ext cx="402336" cy="402336"/>
           </a:xfrm>
           <a:prstGeom prst="ellipse">
             <a:avLst/>
           </a:prstGeom>
           <a:solidFill>
-            <a:srgbClr val="2695C5"/>
+            <a:srgbClr val="7BC9EA"/>
           </a:solidFill>
           <a:ln w="38100">
             <a:solidFill>
@@ -5026,13 +5242,13 @@
       </p:sp>
       <p:sp>
         <p:nvSpPr>
-          <p:cNvPr id="18" name="TextBox 17"/>
+          <p:cNvPr id="20" name="TextBox 19"/>
           <p:cNvSpPr txBox="1"/>
           <p:nvPr/>
         </p:nvSpPr>
         <p:spPr>
           <a:xfrm>
-            <a:off x="8869451" y="2560320"/>
+            <a:off x="8869451" y="2697480"/>
             <a:ext cx="2636443" cy="457200"/>
           </a:xfrm>
           <a:prstGeom prst="rect">
@@ -5054,7 +5270,7 @@
             <a:r>
               <a:rPr sz="1600" b="1" i="0">
                 <a:solidFill>
-                  <a:srgbClr val="2695C5"/>
+                  <a:srgbClr val="7BC9EA"/>
                 </a:solidFill>
               </a:rPr>
               <a:t>지금</a:t>
@@ -5064,13 +5280,13 @@
       </p:sp>
       <p:sp>
         <p:nvSpPr>
-          <p:cNvPr id="19" name="TextBox 18"/>
+          <p:cNvPr id="21" name="TextBox 20"/>
           <p:cNvSpPr txBox="1"/>
           <p:nvPr/>
         </p:nvSpPr>
         <p:spPr>
           <a:xfrm>
-            <a:off x="8915171" y="3749039"/>
+            <a:off x="8915171" y="3886200"/>
             <a:ext cx="2545003" cy="457200"/>
           </a:xfrm>
           <a:prstGeom prst="rect">
@@ -5092,7 +5308,7 @@
             <a:r>
               <a:rPr sz="1800" b="1" i="0">
                 <a:solidFill>
-                  <a:srgbClr val="11485F"/>
+                  <a:srgbClr val="273F49"/>
                 </a:solidFill>
               </a:rPr>
               <a:t>오늘의 우리</a:t>
@@ -5102,13 +5318,13 @@
       </p:sp>
       <p:sp>
         <p:nvSpPr>
-          <p:cNvPr id="20" name="TextBox 19"/>
+          <p:cNvPr id="22" name="TextBox 21"/>
           <p:cNvSpPr txBox="1"/>
           <p:nvPr/>
         </p:nvSpPr>
         <p:spPr>
           <a:xfrm>
-            <a:off x="8915171" y="4251960"/>
+            <a:off x="8915171" y="4389120"/>
             <a:ext cx="2545003" cy="1645920"/>
           </a:xfrm>
           <a:prstGeom prst="rect">
@@ -5130,7 +5346,7 @@
             <a:r>
               <a:rPr sz="1500" b="0" i="0">
                 <a:solidFill>
-                  <a:srgbClr val="2B2B2B"/>
+                  <a:srgbClr val="26231F"/>
                 </a:solidFill>
               </a:rPr>
               <a:t>요즘 우리 이야기</a:t>
@@ -5166,20 +5382,20 @@
       <p:grpSpPr/>
       <p:sp>
         <p:nvSpPr>
-          <p:cNvPr id="3" name="장식"/>
+          <p:cNvPr id="3" name="포인트"/>
           <p:cNvSpPr/>
           <p:nvPr/>
         </p:nvSpPr>
         <p:spPr>
           <a:xfrm>
-            <a:off x="0" y="384048"/>
-            <a:ext cx="9509522" cy="896112"/>
-          </a:xfrm>
-          <a:prstGeom prst="homePlate">
+            <a:off x="5958687" y="246888"/>
+            <a:ext cx="274320" cy="274320"/>
+          </a:xfrm>
+          <a:prstGeom prst="sun">
             <a:avLst/>
           </a:prstGeom>
           <a:solidFill>
-            <a:srgbClr val="2695C5"/>
+            <a:srgbClr val="7BC9EA"/>
           </a:solidFill>
           <a:ln>
             <a:noFill/>
@@ -5190,6 +5406,73 @@
           <a:lstStyle/>
           <a:p>
             <a:pPr algn="ctr"/>
+          </a:p>
+        </p:txBody>
+      </p:sp>
+      <p:sp>
+        <p:nvSpPr>
+          <p:cNvPr id="4" name="장식"/>
+          <p:cNvSpPr/>
+          <p:nvPr/>
+        </p:nvSpPr>
+        <p:spPr>
+          <a:xfrm>
+            <a:off x="5684367" y="1572768"/>
+            <a:ext cx="822960" cy="22860"/>
+          </a:xfrm>
+          <a:prstGeom prst="rect">
+            <a:avLst/>
+          </a:prstGeom>
+          <a:solidFill>
+            <a:srgbClr val="7BC9EA"/>
+          </a:solidFill>
+          <a:ln>
+            <a:noFill/>
+          </a:ln>
+        </p:spPr>
+        <p:txBody>
+          <a:bodyPr rtlCol="0" anchor="ctr"/>
+          <a:lstStyle/>
+          <a:p>
+            <a:pPr algn="ctr"/>
+          </a:p>
+        </p:txBody>
+      </p:sp>
+      <p:sp>
+        <p:nvSpPr>
+          <p:cNvPr id="5" name="상단 라벨"/>
+          <p:cNvSpPr txBox="1"/>
+          <p:nvPr/>
+        </p:nvSpPr>
+        <p:spPr>
+          <a:xfrm>
+            <a:off x="640080" y="182880"/>
+            <a:ext cx="3657600" cy="274320"/>
+          </a:xfrm>
+          <a:prstGeom prst="rect">
+            <a:avLst/>
+          </a:prstGeom>
+          <a:noFill/>
+        </p:spPr>
+        <p:txBody>
+          <a:bodyPr wrap="square" lIns="54864" rIns="54864" tIns="27432" bIns="27432" anchor="ctr">
+            <a:noAutofit/>
+          </a:bodyPr>
+          <a:lstStyle/>
+          <a:p>
+            <a:pPr algn="l">
+              <a:lnSpc>
+                <a:spcPct val="115000"/>
+              </a:lnSpc>
+            </a:pPr>
+            <a:r>
+              <a:rPr sz="800" b="1" i="0" spc="250">
+                <a:solidFill>
+                  <a:srgbClr val="8E8780"/>
+                </a:solidFill>
+              </a:rPr>
+              <a:t>FAMILY ALBUM</a:t>
+            </a:r>
           </a:p>
         </p:txBody>
       </p:sp>
@@ -5205,8 +5488,8 @@
         </p:nvSpPr>
         <p:spPr>
           <a:xfrm>
-            <a:off x="640080" y="411480"/>
-            <a:ext cx="8412242" cy="822960"/>
+            <a:off x="1371600" y="640080"/>
+            <a:ext cx="9448495" cy="868680"/>
           </a:xfrm>
         </p:spPr>
         <p:txBody>
@@ -5215,7 +5498,7 @@
           </a:bodyPr>
           <a:lstStyle/>
           <a:p>
-            <a:pPr algn="l">
+            <a:pPr algn="ctr">
               <a:lnSpc>
                 <a:spcPct val="105000"/>
               </a:lnSpc>
@@ -5223,7 +5506,7 @@
             <a:r>
               <a:rPr sz="3000" b="1" i="0">
                 <a:solidFill>
-                  <a:srgbClr val="FFFFFF"/>
+                  <a:srgbClr val="26231F"/>
                 </a:solidFill>
               </a:rPr>
               <a:t>우리 가족의 약속</a:t>
@@ -5233,26 +5516,26 @@
       </p:sp>
       <p:sp>
         <p:nvSpPr>
-          <p:cNvPr id="4" name="줄 1"/>
+          <p:cNvPr id="6" name="줄 1"/>
           <p:cNvSpPr/>
           <p:nvPr/>
         </p:nvSpPr>
         <p:spPr>
           <a:xfrm>
-            <a:off x="640080" y="1645920"/>
+            <a:off x="640080" y="1783080"/>
             <a:ext cx="10911535" cy="1005840"/>
           </a:xfrm>
           <a:prstGeom prst="roundRect">
             <a:avLst>
-              <a:gd name="adj" fmla="val 8000"/>
+              <a:gd name="adj" fmla="val 7000"/>
             </a:avLst>
           </a:prstGeom>
           <a:solidFill>
-            <a:srgbClr val="EEF8FC"/>
+            <a:srgbClr val="FFFFFF"/>
           </a:solidFill>
           <a:ln w="12700">
             <a:solidFill>
-              <a:srgbClr val="D1EEFA"/>
+              <a:srgbClr val="A5DCF3"/>
             </a:solidFill>
           </a:ln>
         </p:spPr>
@@ -5266,57 +5549,14 @@
       </p:sp>
       <p:sp>
         <p:nvSpPr>
-          <p:cNvPr id="5" name="번호 1"/>
-          <p:cNvSpPr/>
-          <p:nvPr/>
-        </p:nvSpPr>
-        <p:spPr>
-          <a:xfrm>
-            <a:off x="822959" y="1920240"/>
-            <a:ext cx="457200" cy="457200"/>
-          </a:xfrm>
-          <a:prstGeom prst="ellipse">
-            <a:avLst/>
-          </a:prstGeom>
-          <a:solidFill>
-            <a:srgbClr val="2695C5"/>
-          </a:solidFill>
-          <a:ln>
-            <a:noFill/>
-          </a:ln>
-        </p:spPr>
-        <p:txBody>
-          <a:bodyPr rtlCol="0" anchor="ctr" wrap="square" lIns="54864" rIns="54864" tIns="27432" bIns="27432">
-            <a:noAutofit/>
-          </a:bodyPr>
-          <a:lstStyle/>
-          <a:p>
-            <a:pPr algn="ctr">
-              <a:lnSpc>
-                <a:spcPct val="100000"/>
-              </a:lnSpc>
-            </a:pPr>
-            <a:r>
-              <a:rPr sz="1600" b="1" i="0">
-                <a:solidFill>
-                  <a:srgbClr val="FFFFFF"/>
-                </a:solidFill>
-              </a:rPr>
-              <a:t>1</a:t>
-            </a:r>
-          </a:p>
-        </p:txBody>
-      </p:sp>
-      <p:sp>
-        <p:nvSpPr>
-          <p:cNvPr id="6" name="TextBox 5"/>
+          <p:cNvPr id="7" name="번호 1"/>
           <p:cNvSpPr txBox="1"/>
           <p:nvPr/>
         </p:nvSpPr>
         <p:spPr>
           <a:xfrm>
-            <a:off x="1508760" y="1691640"/>
-            <a:ext cx="2743200" cy="914400"/>
+            <a:off x="731519" y="2011680"/>
+            <a:ext cx="914400" cy="548640"/>
           </a:xfrm>
           <a:prstGeom prst="rect">
             <a:avLst/>
@@ -5335,26 +5575,26 @@
               </a:lnSpc>
             </a:pPr>
             <a:r>
-              <a:rPr sz="1800" b="1" i="0">
-                <a:solidFill>
-                  <a:srgbClr val="11485F"/>
-                </a:solidFill>
-              </a:rPr>
-              <a:t>약속 1</a:t>
-            </a:r>
-          </a:p>
-        </p:txBody>
-      </p:sp>
-      <p:sp>
-        <p:nvSpPr>
-          <p:cNvPr id="7" name="TextBox 6"/>
+              <a:rPr sz="2400" b="1" i="0">
+                <a:solidFill>
+                  <a:srgbClr val="7BC9EA"/>
+                </a:solidFill>
+              </a:rPr>
+              <a:t>01</a:t>
+            </a:r>
+          </a:p>
+        </p:txBody>
+      </p:sp>
+      <p:sp>
+        <p:nvSpPr>
+          <p:cNvPr id="8" name="TextBox 7"/>
           <p:cNvSpPr txBox="1"/>
           <p:nvPr/>
         </p:nvSpPr>
         <p:spPr>
           <a:xfrm>
-            <a:off x="4297680" y="1691640"/>
-            <a:ext cx="7071055" cy="914400"/>
+            <a:off x="1508760" y="1828800"/>
+            <a:ext cx="2743200" cy="914400"/>
           </a:xfrm>
           <a:prstGeom prst="rect">
             <a:avLst/>
@@ -5373,9 +5613,47 @@
               </a:lnSpc>
             </a:pPr>
             <a:r>
+              <a:rPr sz="1800" b="1" i="0">
+                <a:solidFill>
+                  <a:srgbClr val="273F49"/>
+                </a:solidFill>
+              </a:rPr>
+              <a:t>약속 1</a:t>
+            </a:r>
+          </a:p>
+        </p:txBody>
+      </p:sp>
+      <p:sp>
+        <p:nvSpPr>
+          <p:cNvPr id="9" name="TextBox 8"/>
+          <p:cNvSpPr txBox="1"/>
+          <p:nvPr/>
+        </p:nvSpPr>
+        <p:spPr>
+          <a:xfrm>
+            <a:off x="4297680" y="1828800"/>
+            <a:ext cx="7071055" cy="914400"/>
+          </a:xfrm>
+          <a:prstGeom prst="rect">
+            <a:avLst/>
+          </a:prstGeom>
+          <a:noFill/>
+        </p:spPr>
+        <p:txBody>
+          <a:bodyPr wrap="square" lIns="54864" rIns="54864" tIns="27432" bIns="27432" anchor="ctr">
+            <a:noAutofit/>
+          </a:bodyPr>
+          <a:lstStyle/>
+          <a:p>
+            <a:pPr algn="l">
+              <a:lnSpc>
+                <a:spcPct val="115000"/>
+              </a:lnSpc>
+            </a:pPr>
+            <a:r>
               <a:rPr sz="1700" b="0" i="0">
                 <a:solidFill>
-                  <a:srgbClr val="2B2B2B"/>
+                  <a:srgbClr val="26231F"/>
                 </a:solidFill>
               </a:rPr>
               <a:t>명절에는 모두 한자리에 모이기</a:t>
@@ -5385,26 +5663,26 @@
       </p:sp>
       <p:sp>
         <p:nvSpPr>
-          <p:cNvPr id="8" name="줄 2"/>
+          <p:cNvPr id="10" name="줄 2"/>
           <p:cNvSpPr/>
           <p:nvPr/>
         </p:nvSpPr>
         <p:spPr>
           <a:xfrm>
-            <a:off x="640080" y="2788920"/>
+            <a:off x="640080" y="2926080"/>
             <a:ext cx="10911535" cy="1005840"/>
           </a:xfrm>
           <a:prstGeom prst="roundRect">
             <a:avLst>
-              <a:gd name="adj" fmla="val 8000"/>
+              <a:gd name="adj" fmla="val 7000"/>
             </a:avLst>
           </a:prstGeom>
           <a:solidFill>
-            <a:srgbClr val="EEF8FC"/>
+            <a:srgbClr val="FFFFFF"/>
           </a:solidFill>
           <a:ln w="12700">
             <a:solidFill>
-              <a:srgbClr val="D1EEFA"/>
+              <a:srgbClr val="A5DCF3"/>
             </a:solidFill>
           </a:ln>
         </p:spPr>
@@ -5418,57 +5696,14 @@
       </p:sp>
       <p:sp>
         <p:nvSpPr>
-          <p:cNvPr id="9" name="번호 2"/>
-          <p:cNvSpPr/>
-          <p:nvPr/>
-        </p:nvSpPr>
-        <p:spPr>
-          <a:xfrm>
-            <a:off x="822959" y="3063239"/>
-            <a:ext cx="457200" cy="457200"/>
-          </a:xfrm>
-          <a:prstGeom prst="ellipse">
-            <a:avLst/>
-          </a:prstGeom>
-          <a:solidFill>
-            <a:srgbClr val="2695C5"/>
-          </a:solidFill>
-          <a:ln>
-            <a:noFill/>
-          </a:ln>
-        </p:spPr>
-        <p:txBody>
-          <a:bodyPr rtlCol="0" anchor="ctr" wrap="square" lIns="54864" rIns="54864" tIns="27432" bIns="27432">
-            <a:noAutofit/>
-          </a:bodyPr>
-          <a:lstStyle/>
-          <a:p>
-            <a:pPr algn="ctr">
-              <a:lnSpc>
-                <a:spcPct val="100000"/>
-              </a:lnSpc>
-            </a:pPr>
-            <a:r>
-              <a:rPr sz="1600" b="1" i="0">
-                <a:solidFill>
-                  <a:srgbClr val="FFFFFF"/>
-                </a:solidFill>
-              </a:rPr>
-              <a:t>2</a:t>
-            </a:r>
-          </a:p>
-        </p:txBody>
-      </p:sp>
-      <p:sp>
-        <p:nvSpPr>
-          <p:cNvPr id="10" name="TextBox 9"/>
+          <p:cNvPr id="11" name="번호 2"/>
           <p:cNvSpPr txBox="1"/>
           <p:nvPr/>
         </p:nvSpPr>
         <p:spPr>
           <a:xfrm>
-            <a:off x="1508760" y="2834639"/>
-            <a:ext cx="2743200" cy="914400"/>
+            <a:off x="731519" y="3154680"/>
+            <a:ext cx="914400" cy="548640"/>
           </a:xfrm>
           <a:prstGeom prst="rect">
             <a:avLst/>
@@ -5487,26 +5722,26 @@
               </a:lnSpc>
             </a:pPr>
             <a:r>
-              <a:rPr sz="1800" b="1" i="0">
-                <a:solidFill>
-                  <a:srgbClr val="11485F"/>
-                </a:solidFill>
-              </a:rPr>
-              <a:t>약속 2</a:t>
-            </a:r>
-          </a:p>
-        </p:txBody>
-      </p:sp>
-      <p:sp>
-        <p:nvSpPr>
-          <p:cNvPr id="11" name="TextBox 10"/>
+              <a:rPr sz="2400" b="1" i="0">
+                <a:solidFill>
+                  <a:srgbClr val="7BC9EA"/>
+                </a:solidFill>
+              </a:rPr>
+              <a:t>02</a:t>
+            </a:r>
+          </a:p>
+        </p:txBody>
+      </p:sp>
+      <p:sp>
+        <p:nvSpPr>
+          <p:cNvPr id="12" name="TextBox 11"/>
           <p:cNvSpPr txBox="1"/>
           <p:nvPr/>
         </p:nvSpPr>
         <p:spPr>
           <a:xfrm>
-            <a:off x="4297680" y="2834639"/>
-            <a:ext cx="7071055" cy="914400"/>
+            <a:off x="1508760" y="2971800"/>
+            <a:ext cx="2743200" cy="914400"/>
           </a:xfrm>
           <a:prstGeom prst="rect">
             <a:avLst/>
@@ -5525,9 +5760,47 @@
               </a:lnSpc>
             </a:pPr>
             <a:r>
+              <a:rPr sz="1800" b="1" i="0">
+                <a:solidFill>
+                  <a:srgbClr val="273F49"/>
+                </a:solidFill>
+              </a:rPr>
+              <a:t>약속 2</a:t>
+            </a:r>
+          </a:p>
+        </p:txBody>
+      </p:sp>
+      <p:sp>
+        <p:nvSpPr>
+          <p:cNvPr id="13" name="TextBox 12"/>
+          <p:cNvSpPr txBox="1"/>
+          <p:nvPr/>
+        </p:nvSpPr>
+        <p:spPr>
+          <a:xfrm>
+            <a:off x="4297680" y="2971800"/>
+            <a:ext cx="7071055" cy="914400"/>
+          </a:xfrm>
+          <a:prstGeom prst="rect">
+            <a:avLst/>
+          </a:prstGeom>
+          <a:noFill/>
+        </p:spPr>
+        <p:txBody>
+          <a:bodyPr wrap="square" lIns="54864" rIns="54864" tIns="27432" bIns="27432" anchor="ctr">
+            <a:noAutofit/>
+          </a:bodyPr>
+          <a:lstStyle/>
+          <a:p>
+            <a:pPr algn="l">
+              <a:lnSpc>
+                <a:spcPct val="115000"/>
+              </a:lnSpc>
+            </a:pPr>
+            <a:r>
               <a:rPr sz="1700" b="0" i="0">
                 <a:solidFill>
-                  <a:srgbClr val="2B2B2B"/>
+                  <a:srgbClr val="26231F"/>
                 </a:solidFill>
               </a:rPr>
               <a:t>어른께 먼저 안부 전하기</a:t>
@@ -5537,26 +5810,26 @@
       </p:sp>
       <p:sp>
         <p:nvSpPr>
-          <p:cNvPr id="12" name="줄 3"/>
+          <p:cNvPr id="14" name="줄 3"/>
           <p:cNvSpPr/>
           <p:nvPr/>
         </p:nvSpPr>
         <p:spPr>
           <a:xfrm>
-            <a:off x="640080" y="3931920"/>
+            <a:off x="640080" y="4069080"/>
             <a:ext cx="10911535" cy="1005840"/>
           </a:xfrm>
           <a:prstGeom prst="roundRect">
             <a:avLst>
-              <a:gd name="adj" fmla="val 8000"/>
+              <a:gd name="adj" fmla="val 7000"/>
             </a:avLst>
           </a:prstGeom>
           <a:solidFill>
-            <a:srgbClr val="EEF8FC"/>
+            <a:srgbClr val="FFFFFF"/>
           </a:solidFill>
           <a:ln w="12700">
             <a:solidFill>
-              <a:srgbClr val="D1EEFA"/>
+              <a:srgbClr val="A5DCF3"/>
             </a:solidFill>
           </a:ln>
         </p:spPr>
@@ -5570,57 +5843,14 @@
       </p:sp>
       <p:sp>
         <p:nvSpPr>
-          <p:cNvPr id="13" name="번호 3"/>
-          <p:cNvSpPr/>
-          <p:nvPr/>
-        </p:nvSpPr>
-        <p:spPr>
-          <a:xfrm>
-            <a:off x="822959" y="4206240"/>
-            <a:ext cx="457200" cy="457200"/>
-          </a:xfrm>
-          <a:prstGeom prst="ellipse">
-            <a:avLst/>
-          </a:prstGeom>
-          <a:solidFill>
-            <a:srgbClr val="2695C5"/>
-          </a:solidFill>
-          <a:ln>
-            <a:noFill/>
-          </a:ln>
-        </p:spPr>
-        <p:txBody>
-          <a:bodyPr rtlCol="0" anchor="ctr" wrap="square" lIns="54864" rIns="54864" tIns="27432" bIns="27432">
-            <a:noAutofit/>
-          </a:bodyPr>
-          <a:lstStyle/>
-          <a:p>
-            <a:pPr algn="ctr">
-              <a:lnSpc>
-                <a:spcPct val="100000"/>
-              </a:lnSpc>
-            </a:pPr>
-            <a:r>
-              <a:rPr sz="1600" b="1" i="0">
-                <a:solidFill>
-                  <a:srgbClr val="FFFFFF"/>
-                </a:solidFill>
-              </a:rPr>
-              <a:t>3</a:t>
-            </a:r>
-          </a:p>
-        </p:txBody>
-      </p:sp>
-      <p:sp>
-        <p:nvSpPr>
-          <p:cNvPr id="14" name="TextBox 13"/>
+          <p:cNvPr id="15" name="번호 3"/>
           <p:cNvSpPr txBox="1"/>
           <p:nvPr/>
         </p:nvSpPr>
         <p:spPr>
           <a:xfrm>
-            <a:off x="1508760" y="3977639"/>
-            <a:ext cx="2743200" cy="914400"/>
+            <a:off x="731519" y="4297680"/>
+            <a:ext cx="914400" cy="548640"/>
           </a:xfrm>
           <a:prstGeom prst="rect">
             <a:avLst/>
@@ -5639,26 +5869,26 @@
               </a:lnSpc>
             </a:pPr>
             <a:r>
-              <a:rPr sz="1800" b="1" i="0">
-                <a:solidFill>
-                  <a:srgbClr val="11485F"/>
-                </a:solidFill>
-              </a:rPr>
-              <a:t>약속 3</a:t>
-            </a:r>
-          </a:p>
-        </p:txBody>
-      </p:sp>
-      <p:sp>
-        <p:nvSpPr>
-          <p:cNvPr id="15" name="TextBox 14"/>
+              <a:rPr sz="2400" b="1" i="0">
+                <a:solidFill>
+                  <a:srgbClr val="7BC9EA"/>
+                </a:solidFill>
+              </a:rPr>
+              <a:t>03</a:t>
+            </a:r>
+          </a:p>
+        </p:txBody>
+      </p:sp>
+      <p:sp>
+        <p:nvSpPr>
+          <p:cNvPr id="16" name="TextBox 15"/>
           <p:cNvSpPr txBox="1"/>
           <p:nvPr/>
         </p:nvSpPr>
         <p:spPr>
           <a:xfrm>
-            <a:off x="4297680" y="3977639"/>
-            <a:ext cx="7071055" cy="914400"/>
+            <a:off x="1508760" y="4114800"/>
+            <a:ext cx="2743200" cy="914400"/>
           </a:xfrm>
           <a:prstGeom prst="rect">
             <a:avLst/>
@@ -5677,9 +5907,47 @@
               </a:lnSpc>
             </a:pPr>
             <a:r>
+              <a:rPr sz="1800" b="1" i="0">
+                <a:solidFill>
+                  <a:srgbClr val="273F49"/>
+                </a:solidFill>
+              </a:rPr>
+              <a:t>약속 3</a:t>
+            </a:r>
+          </a:p>
+        </p:txBody>
+      </p:sp>
+      <p:sp>
+        <p:nvSpPr>
+          <p:cNvPr id="17" name="TextBox 16"/>
+          <p:cNvSpPr txBox="1"/>
+          <p:nvPr/>
+        </p:nvSpPr>
+        <p:spPr>
+          <a:xfrm>
+            <a:off x="4297680" y="4114800"/>
+            <a:ext cx="7071055" cy="914400"/>
+          </a:xfrm>
+          <a:prstGeom prst="rect">
+            <a:avLst/>
+          </a:prstGeom>
+          <a:noFill/>
+        </p:spPr>
+        <p:txBody>
+          <a:bodyPr wrap="square" lIns="54864" rIns="54864" tIns="27432" bIns="27432" anchor="ctr">
+            <a:noAutofit/>
+          </a:bodyPr>
+          <a:lstStyle/>
+          <a:p>
+            <a:pPr algn="l">
+              <a:lnSpc>
+                <a:spcPct val="115000"/>
+              </a:lnSpc>
+            </a:pPr>
+            <a:r>
               <a:rPr sz="1700" b="0" i="0">
                 <a:solidFill>
-                  <a:srgbClr val="2B2B2B"/>
+                  <a:srgbClr val="26231F"/>
                 </a:solidFill>
               </a:rPr>
               <a:t>한 달에 한 번 가족 식사</a:t>
@@ -5715,20 +5983,20 @@
       <p:grpSpPr/>
       <p:sp>
         <p:nvSpPr>
-          <p:cNvPr id="3" name="장식"/>
+          <p:cNvPr id="3" name="포인트"/>
           <p:cNvSpPr/>
           <p:nvPr/>
         </p:nvSpPr>
         <p:spPr>
           <a:xfrm>
-            <a:off x="0" y="384048"/>
-            <a:ext cx="9509522" cy="896112"/>
-          </a:xfrm>
-          <a:prstGeom prst="homePlate">
+            <a:off x="5958687" y="246888"/>
+            <a:ext cx="274320" cy="274320"/>
+          </a:xfrm>
+          <a:prstGeom prst="sun">
             <a:avLst/>
           </a:prstGeom>
           <a:solidFill>
-            <a:srgbClr val="2695C5"/>
+            <a:srgbClr val="7BC9EA"/>
           </a:solidFill>
           <a:ln>
             <a:noFill/>
@@ -5739,6 +6007,73 @@
           <a:lstStyle/>
           <a:p>
             <a:pPr algn="ctr"/>
+          </a:p>
+        </p:txBody>
+      </p:sp>
+      <p:sp>
+        <p:nvSpPr>
+          <p:cNvPr id="4" name="장식"/>
+          <p:cNvSpPr/>
+          <p:nvPr/>
+        </p:nvSpPr>
+        <p:spPr>
+          <a:xfrm>
+            <a:off x="5684367" y="1572768"/>
+            <a:ext cx="822960" cy="22860"/>
+          </a:xfrm>
+          <a:prstGeom prst="rect">
+            <a:avLst/>
+          </a:prstGeom>
+          <a:solidFill>
+            <a:srgbClr val="7BC9EA"/>
+          </a:solidFill>
+          <a:ln>
+            <a:noFill/>
+          </a:ln>
+        </p:spPr>
+        <p:txBody>
+          <a:bodyPr rtlCol="0" anchor="ctr"/>
+          <a:lstStyle/>
+          <a:p>
+            <a:pPr algn="ctr"/>
+          </a:p>
+        </p:txBody>
+      </p:sp>
+      <p:sp>
+        <p:nvSpPr>
+          <p:cNvPr id="5" name="상단 라벨"/>
+          <p:cNvSpPr txBox="1"/>
+          <p:nvPr/>
+        </p:nvSpPr>
+        <p:spPr>
+          <a:xfrm>
+            <a:off x="640080" y="182880"/>
+            <a:ext cx="3657600" cy="274320"/>
+          </a:xfrm>
+          <a:prstGeom prst="rect">
+            <a:avLst/>
+          </a:prstGeom>
+          <a:noFill/>
+        </p:spPr>
+        <p:txBody>
+          <a:bodyPr wrap="square" lIns="54864" rIns="54864" tIns="27432" bIns="27432" anchor="ctr">
+            <a:noAutofit/>
+          </a:bodyPr>
+          <a:lstStyle/>
+          <a:p>
+            <a:pPr algn="l">
+              <a:lnSpc>
+                <a:spcPct val="115000"/>
+              </a:lnSpc>
+            </a:pPr>
+            <a:r>
+              <a:rPr sz="800" b="1" i="0" spc="250">
+                <a:solidFill>
+                  <a:srgbClr val="8E8780"/>
+                </a:solidFill>
+              </a:rPr>
+              <a:t>FAMILY ALBUM</a:t>
+            </a:r>
           </a:p>
         </p:txBody>
       </p:sp>
@@ -5754,8 +6089,8 @@
         </p:nvSpPr>
         <p:spPr>
           <a:xfrm>
-            <a:off x="640080" y="411480"/>
-            <a:ext cx="8412242" cy="822960"/>
+            <a:off x="1371600" y="640080"/>
+            <a:ext cx="9448495" cy="868680"/>
           </a:xfrm>
         </p:spPr>
         <p:txBody>
@@ -5764,7 +6099,7 @@
           </a:bodyPr>
           <a:lstStyle/>
           <a:p>
-            <a:pPr algn="l">
+            <a:pPr algn="ctr">
               <a:lnSpc>
                 <a:spcPct val="105000"/>
               </a:lnSpc>
@@ -5772,7 +6107,7 @@
             <a:r>
               <a:rPr sz="3000" b="1" i="0">
                 <a:solidFill>
-                  <a:srgbClr val="FFFFFF"/>
+                  <a:srgbClr val="26231F"/>
                 </a:solidFill>
               </a:rPr>
               <a:t>가족 사진</a:t>
@@ -5782,14 +6117,14 @@
       </p:sp>
       <p:sp>
         <p:nvSpPr>
-          <p:cNvPr id="4" name="사진 자리"/>
+          <p:cNvPr id="6" name="사진 자리"/>
           <p:cNvSpPr/>
           <p:nvPr/>
         </p:nvSpPr>
         <p:spPr>
           <a:xfrm>
-            <a:off x="640080" y="1645920"/>
-            <a:ext cx="3515258" cy="2286000"/>
+            <a:off x="640080" y="1783080"/>
+            <a:ext cx="3515258" cy="2194560"/>
           </a:xfrm>
           <a:prstGeom prst="roundRect">
             <a:avLst>
@@ -5800,9 +6135,7 @@
             <a:srgbClr val="D1EEFA"/>
           </a:solidFill>
           <a:ln w="19050">
-            <a:solidFill>
-              <a:srgbClr val="2695C5"/>
-            </a:solidFill>
+            <a:noFill/>
             <a:prstDash val="dash"/>
           </a:ln>
         </p:spPr>
@@ -5820,7 +6153,7 @@
             <a:r>
               <a:rPr sz="1200" b="0" i="0">
                 <a:solidFill>
-                  <a:srgbClr val="11485F"/>
+                  <a:srgbClr val="8E8780"/>
                 </a:solidFill>
               </a:rPr>
               <a:t>사진 1</a:t>
@@ -5830,14 +6163,14 @@
       </p:sp>
       <p:sp>
         <p:nvSpPr>
-          <p:cNvPr id="5" name="사진 자리"/>
+          <p:cNvPr id="7" name="사진 자리"/>
           <p:cNvSpPr/>
           <p:nvPr/>
         </p:nvSpPr>
         <p:spPr>
           <a:xfrm>
-            <a:off x="4338218" y="1645920"/>
-            <a:ext cx="3515258" cy="2286000"/>
+            <a:off x="4338218" y="1783080"/>
+            <a:ext cx="3515258" cy="2194560"/>
           </a:xfrm>
           <a:prstGeom prst="roundRect">
             <a:avLst>
@@ -5848,9 +6181,7 @@
             <a:srgbClr val="D1EEFA"/>
           </a:solidFill>
           <a:ln w="19050">
-            <a:solidFill>
-              <a:srgbClr val="2695C5"/>
-            </a:solidFill>
+            <a:noFill/>
             <a:prstDash val="dash"/>
           </a:ln>
         </p:spPr>
@@ -5868,7 +6199,7 @@
             <a:r>
               <a:rPr sz="1200" b="0" i="0">
                 <a:solidFill>
-                  <a:srgbClr val="11485F"/>
+                  <a:srgbClr val="8E8780"/>
                 </a:solidFill>
               </a:rPr>
               <a:t>사진 2</a:t>
@@ -5878,14 +6209,14 @@
       </p:sp>
       <p:sp>
         <p:nvSpPr>
-          <p:cNvPr id="6" name="사진 자리"/>
+          <p:cNvPr id="8" name="사진 자리"/>
           <p:cNvSpPr/>
           <p:nvPr/>
         </p:nvSpPr>
         <p:spPr>
           <a:xfrm>
-            <a:off x="8036356" y="1645920"/>
-            <a:ext cx="3515258" cy="2286000"/>
+            <a:off x="8036356" y="1783080"/>
+            <a:ext cx="3515258" cy="2194560"/>
           </a:xfrm>
           <a:prstGeom prst="roundRect">
             <a:avLst>
@@ -5896,9 +6227,7 @@
             <a:srgbClr val="D1EEFA"/>
           </a:solidFill>
           <a:ln w="19050">
-            <a:solidFill>
-              <a:srgbClr val="2695C5"/>
-            </a:solidFill>
+            <a:noFill/>
             <a:prstDash val="dash"/>
           </a:ln>
         </p:spPr>
@@ -5916,7 +6245,7 @@
             <a:r>
               <a:rPr sz="1200" b="0" i="0">
                 <a:solidFill>
-                  <a:srgbClr val="11485F"/>
+                  <a:srgbClr val="8E8780"/>
                 </a:solidFill>
               </a:rPr>
               <a:t>사진 3</a:t>
@@ -5926,14 +6255,14 @@
       </p:sp>
       <p:sp>
         <p:nvSpPr>
-          <p:cNvPr id="7" name="사진 자리"/>
+          <p:cNvPr id="9" name="사진 자리"/>
           <p:cNvSpPr/>
           <p:nvPr/>
         </p:nvSpPr>
         <p:spPr>
           <a:xfrm>
-            <a:off x="640080" y="4114800"/>
-            <a:ext cx="3515258" cy="2286000"/>
+            <a:off x="640080" y="4160520"/>
+            <a:ext cx="3515258" cy="2194560"/>
           </a:xfrm>
           <a:prstGeom prst="roundRect">
             <a:avLst>
@@ -5944,9 +6273,7 @@
             <a:srgbClr val="D1EEFA"/>
           </a:solidFill>
           <a:ln w="19050">
-            <a:solidFill>
-              <a:srgbClr val="2695C5"/>
-            </a:solidFill>
+            <a:noFill/>
             <a:prstDash val="dash"/>
           </a:ln>
         </p:spPr>
@@ -5964,7 +6291,7 @@
             <a:r>
               <a:rPr sz="1200" b="0" i="0">
                 <a:solidFill>
-                  <a:srgbClr val="11485F"/>
+                  <a:srgbClr val="8E8780"/>
                 </a:solidFill>
               </a:rPr>
               <a:t>사진 4</a:t>
@@ -5974,14 +6301,14 @@
       </p:sp>
       <p:sp>
         <p:nvSpPr>
-          <p:cNvPr id="8" name="사진 자리"/>
+          <p:cNvPr id="10" name="사진 자리"/>
           <p:cNvSpPr/>
           <p:nvPr/>
         </p:nvSpPr>
         <p:spPr>
           <a:xfrm>
-            <a:off x="4338218" y="4114800"/>
-            <a:ext cx="3515258" cy="2286000"/>
+            <a:off x="4338218" y="4160520"/>
+            <a:ext cx="3515258" cy="2194560"/>
           </a:xfrm>
           <a:prstGeom prst="roundRect">
             <a:avLst>
@@ -5992,9 +6319,7 @@
             <a:srgbClr val="D1EEFA"/>
           </a:solidFill>
           <a:ln w="19050">
-            <a:solidFill>
-              <a:srgbClr val="2695C5"/>
-            </a:solidFill>
+            <a:noFill/>
             <a:prstDash val="dash"/>
           </a:ln>
         </p:spPr>
@@ -6012,7 +6337,7 @@
             <a:r>
               <a:rPr sz="1200" b="0" i="0">
                 <a:solidFill>
-                  <a:srgbClr val="11485F"/>
+                  <a:srgbClr val="8E8780"/>
                 </a:solidFill>
               </a:rPr>
               <a:t>사진 5</a:t>
@@ -6022,14 +6347,14 @@
       </p:sp>
       <p:sp>
         <p:nvSpPr>
-          <p:cNvPr id="9" name="사진 자리"/>
+          <p:cNvPr id="11" name="사진 자리"/>
           <p:cNvSpPr/>
           <p:nvPr/>
         </p:nvSpPr>
         <p:spPr>
           <a:xfrm>
-            <a:off x="8036356" y="4114800"/>
-            <a:ext cx="3515258" cy="2286000"/>
+            <a:off x="8036356" y="4160520"/>
+            <a:ext cx="3515258" cy="2194560"/>
           </a:xfrm>
           <a:prstGeom prst="roundRect">
             <a:avLst>
@@ -6040,9 +6365,7 @@
             <a:srgbClr val="D1EEFA"/>
           </a:solidFill>
           <a:ln w="19050">
-            <a:solidFill>
-              <a:srgbClr val="2695C5"/>
-            </a:solidFill>
+            <a:noFill/>
             <a:prstDash val="dash"/>
           </a:ln>
         </p:spPr>
@@ -6060,7 +6383,7 @@
             <a:r>
               <a:rPr sz="1200" b="0" i="0">
                 <a:solidFill>
-                  <a:srgbClr val="11485F"/>
+                  <a:srgbClr val="8E8780"/>
                 </a:solidFill>
               </a:rPr>
               <a:t>사진 6</a:t>
@@ -6079,6 +6402,14 @@
 <file path=ppt/slides/slide6.xml><?xml version="1.0" encoding="utf-8"?>
 <p:sld xmlns:a="http://schemas.openxmlformats.org/drawingml/2006/main" xmlns:p="http://schemas.openxmlformats.org/presentationml/2006/main" xmlns:r="http://schemas.openxmlformats.org/officeDocument/2006/relationships">
   <p:cSld>
+    <p:bg>
+      <p:bgPr>
+        <a:solidFill>
+          <a:srgbClr val="EAF7FD"/>
+        </a:solidFill>
+        <a:effectLst/>
+      </p:bgPr>
+    </p:bg>
     <p:spTree>
       <p:nvGrpSpPr>
         <p:cNvPr id="1" name=""/>
@@ -6086,30 +6417,116 @@
         <p:nvPr/>
       </p:nvGrpSpPr>
       <p:grpSpPr/>
-      <p:pic>
-        <p:nvPicPr>
-          <p:cNvPr id="3" name="표지 그림" descr="family-18.jpg"/>
-          <p:cNvPicPr>
-            <a:picLocks noChangeAspect="1"/>
-          </p:cNvPicPr>
-          <p:nvPr/>
-        </p:nvPicPr>
-        <p:blipFill>
-          <a:blip r:embed="rId2"/>
-          <a:stretch>
-            <a:fillRect/>
-          </a:stretch>
-        </p:blipFill>
+      <p:sp>
+        <p:nvSpPr>
+          <p:cNvPr id="3" name="사진 자리"/>
+          <p:cNvSpPr/>
+          <p:nvPr/>
+        </p:nvSpPr>
         <p:spPr>
           <a:xfrm>
             <a:off x="0" y="0"/>
-            <a:ext cx="12191695" cy="6858000"/>
+            <a:ext cx="4389010" cy="6858000"/>
           </a:xfrm>
           <a:prstGeom prst="rect">
             <a:avLst/>
           </a:prstGeom>
-        </p:spPr>
-      </p:pic>
+          <a:solidFill>
+            <a:srgbClr val="A5DCF3"/>
+          </a:solidFill>
+          <a:ln>
+            <a:noFill/>
+          </a:ln>
+        </p:spPr>
+        <p:txBody>
+          <a:bodyPr rtlCol="0" anchor="ctr" wrap="square" lIns="54864" rIns="54864" tIns="27432" bIns="27432">
+            <a:noAutofit/>
+          </a:bodyPr>
+          <a:lstStyle/>
+          <a:p>
+            <a:pPr algn="ctr">
+              <a:lnSpc>
+                <a:spcPct val="100000"/>
+              </a:lnSpc>
+            </a:pPr>
+            <a:r>
+              <a:rPr sz="1400" b="0" i="0">
+                <a:solidFill>
+                  <a:srgbClr val="273F49"/>
+                </a:solidFill>
+              </a:rPr>
+              <a:t>사진을 넣어 주세요</a:t>
+            </a:r>
+          </a:p>
+        </p:txBody>
+      </p:sp>
+      <p:sp>
+        <p:nvSpPr>
+          <p:cNvPr id="4" name="장식"/>
+          <p:cNvSpPr/>
+          <p:nvPr/>
+        </p:nvSpPr>
+        <p:spPr>
+          <a:xfrm>
+            <a:off x="365750" y="365760"/>
+            <a:ext cx="3657508" cy="6126480"/>
+          </a:xfrm>
+          <a:prstGeom prst="rect">
+            <a:avLst/>
+          </a:prstGeom>
+          <a:noFill/>
+          <a:ln w="9525">
+            <a:solidFill>
+              <a:srgbClr val="26231F"/>
+            </a:solidFill>
+          </a:ln>
+        </p:spPr>
+        <p:txBody>
+          <a:bodyPr rtlCol="0" anchor="ctr"/>
+          <a:lstStyle/>
+          <a:p>
+            <a:pPr algn="ctr"/>
+          </a:p>
+        </p:txBody>
+      </p:sp>
+      <p:sp>
+        <p:nvSpPr>
+          <p:cNvPr id="5" name="라벨"/>
+          <p:cNvSpPr txBox="1"/>
+          <p:nvPr/>
+        </p:nvSpPr>
+        <p:spPr>
+          <a:xfrm>
+            <a:off x="6827349" y="2148840"/>
+            <a:ext cx="4632844" cy="274320"/>
+          </a:xfrm>
+          <a:prstGeom prst="rect">
+            <a:avLst/>
+          </a:prstGeom>
+          <a:noFill/>
+        </p:spPr>
+        <p:txBody>
+          <a:bodyPr wrap="square" lIns="54864" rIns="54864" tIns="27432" bIns="27432" anchor="t">
+            <a:noAutofit/>
+          </a:bodyPr>
+          <a:lstStyle/>
+          <a:p>
+            <a:pPr algn="l">
+              <a:lnSpc>
+                <a:spcPct val="115000"/>
+              </a:lnSpc>
+            </a:pPr>
+            <a:r>
+              <a:rPr sz="1000" b="1" i="0" spc="250">
+                <a:solidFill>
+                  <a:srgbClr val="26231F"/>
+                </a:solidFill>
+              </a:rPr>
+              <a:t>FAMILY ALBUM</a:t>
+            </a:r>
+          </a:p>
+        </p:txBody>
+      </p:sp>
       <p:sp>
         <p:nvSpPr>
           <p:cNvPr id="2" name="Title 1"/>
@@ -6122,8 +6539,8 @@
         </p:nvSpPr>
         <p:spPr>
           <a:xfrm>
-            <a:off x="853418" y="2057400"/>
-            <a:ext cx="6095847" cy="1554480"/>
+            <a:off x="6827349" y="2606040"/>
+            <a:ext cx="4632844" cy="1188720"/>
           </a:xfrm>
         </p:spPr>
         <p:txBody>
@@ -6138,9 +6555,9 @@
               </a:lnSpc>
             </a:pPr>
             <a:r>
-              <a:rPr sz="3600" b="1" i="0">
-                <a:solidFill>
-                  <a:srgbClr val="11485F"/>
+              <a:rPr sz="4000" b="1" i="0">
+                <a:solidFill>
+                  <a:srgbClr val="26231F"/>
                 </a:solidFill>
               </a:rPr>
               <a:t>우리 가족 소개를 마칩니다</a:t>
@@ -6150,14 +6567,14 @@
       </p:sp>
       <p:sp>
         <p:nvSpPr>
-          <p:cNvPr id="4" name="한 줄 문구"/>
+          <p:cNvPr id="6" name="한 줄 문구"/>
           <p:cNvSpPr txBox="1"/>
           <p:nvPr/>
         </p:nvSpPr>
         <p:spPr>
           <a:xfrm>
-            <a:off x="853418" y="3749039"/>
-            <a:ext cx="6095847" cy="822960"/>
+            <a:off x="6827349" y="3886200"/>
+            <a:ext cx="4632844" cy="822960"/>
           </a:xfrm>
           <a:prstGeom prst="rect">
             <a:avLst/>
@@ -6176,9 +6593,9 @@
               </a:lnSpc>
             </a:pPr>
             <a:r>
-              <a:rPr sz="1700" b="0" i="1">
-                <a:solidFill>
-                  <a:srgbClr val="11485F"/>
+              <a:rPr sz="1700" b="0" i="0">
+                <a:solidFill>
+                  <a:srgbClr val="26231F"/>
                 </a:solidFill>
               </a:rPr>
               <a:t>읽어 주셔서 고맙습니다</a:t>
@@ -6188,14 +6605,14 @@
       </p:sp>
       <p:sp>
         <p:nvSpPr>
-          <p:cNvPr id="5" name="안내 문구"/>
+          <p:cNvPr id="7" name="안내 문구"/>
           <p:cNvSpPr txBox="1"/>
           <p:nvPr/>
         </p:nvSpPr>
         <p:spPr>
           <a:xfrm>
-            <a:off x="853418" y="4617720"/>
-            <a:ext cx="6095847" cy="914400"/>
+            <a:off x="6827349" y="4754880"/>
+            <a:ext cx="4632844" cy="914400"/>
           </a:xfrm>
           <a:prstGeom prst="rect">
             <a:avLst/>
@@ -6216,7 +6633,7 @@
             <a:r>
               <a:rPr sz="1400" b="0" i="0">
                 <a:solidFill>
-                  <a:srgbClr val="666666"/>
+                  <a:srgbClr val="26231F"/>
                 </a:solidFill>
               </a:rPr>
               <a:t>고맙습니다 · 가족 이름</a:t>
@@ -6243,34 +6660,34 @@
         <a:sysClr val="window" lastClr="FFFFFF"/>
       </a:lt1>
       <a:dk2>
-        <a:srgbClr val="11485F"/>
+        <a:srgbClr val="273F49"/>
       </a:dk2>
       <a:lt2>
-        <a:srgbClr val="EEF8FC"/>
+        <a:srgbClr val="EAF7FD"/>
       </a:lt2>
       <a:accent1>
-        <a:srgbClr val="2695C5"/>
+        <a:srgbClr val="7BC9EA"/>
       </a:accent1>
       <a:accent2>
-        <a:srgbClr val="209DB6"/>
+        <a:srgbClr val="9FB1EF"/>
       </a:accent2>
       <a:accent3>
-        <a:srgbClr val="11485F"/>
+        <a:srgbClr val="273F49"/>
       </a:accent3>
       <a:accent4>
         <a:srgbClr val="D1EEFA"/>
       </a:accent4>
       <a:accent5>
-        <a:srgbClr val="2399BE"/>
+        <a:srgbClr val="8DBDEC"/>
       </a:accent5>
       <a:accent6>
-        <a:srgbClr val="70919F"/>
+        <a:srgbClr val="7D8C92"/>
       </a:accent6>
       <a:hlink>
-        <a:srgbClr val="2695C5"/>
+        <a:srgbClr val="7BC9EA"/>
       </a:hlink>
       <a:folHlink>
-        <a:srgbClr val="11485F"/>
+        <a:srgbClr val="273F49"/>
       </a:folHlink>
     </a:clrScheme>
     <a:fontScheme name="Office">
